--- a/powerpoint/BeerFlow_Strategy_Deck.pptx
+++ b/powerpoint/BeerFlow_Strategy_Deck.pptx
@@ -17607,7 +17607,7 @@
         <p:spPr>
           <a:xfrm>
             <a:off x="365760" y="1234440"/>
-            <a:ext cx="5669280" cy="256032"/>
+            <a:ext cx="5486400" cy="256032"/>
           </a:xfrm>
           <a:prstGeom prst="rect">
             <a:avLst/>
@@ -17622,7 +17622,7 @@
           <a:p>
             <a:pPr algn="l"/>
             <a:r>
-              <a:rPr sz="1200" b="1" i="0">
+              <a:rPr sz="1100" b="1" i="0">
                 <a:solidFill>
                   <a:srgbClr val="1F3864"/>
                 </a:solidFill>
@@ -17642,7 +17642,7 @@
         <p:spPr>
           <a:xfrm>
             <a:off x="365760" y="1536192"/>
-            <a:ext cx="2377440" cy="274320"/>
+            <a:ext cx="2286000" cy="274320"/>
           </a:xfrm>
           <a:prstGeom prst="rect">
             <a:avLst/>
@@ -17685,22 +17685,22 @@
         <p:spPr>
           <a:xfrm>
             <a:off x="402336" y="1554480"/>
-            <a:ext cx="2304288" cy="237744"/>
-          </a:xfrm>
-          <a:prstGeom prst="rect">
-            <a:avLst/>
-          </a:prstGeom>
-          <a:noFill/>
-        </p:spPr>
-        <p:txBody>
-          <a:bodyPr wrap="square">
-            <a:spAutoFit/>
-          </a:bodyPr>
-          <a:lstStyle/>
-          <a:p>
-            <a:pPr algn="ctr"/>
-            <a:r>
-              <a:rPr sz="850" b="1" i="0">
+            <a:ext cx="2212848" cy="237744"/>
+          </a:xfrm>
+          <a:prstGeom prst="rect">
+            <a:avLst/>
+          </a:prstGeom>
+          <a:noFill/>
+        </p:spPr>
+        <p:txBody>
+          <a:bodyPr wrap="square">
+            <a:spAutoFit/>
+          </a:bodyPr>
+          <a:lstStyle/>
+          <a:p>
+            <a:pPr algn="ctr"/>
+            <a:r>
+              <a:rPr sz="800" b="1" i="0">
                 <a:solidFill>
                   <a:srgbClr val="FFFFFF"/>
                 </a:solidFill>
@@ -17719,8 +17719,8 @@
         </p:nvSpPr>
         <p:spPr>
           <a:xfrm>
-            <a:off x="2743200" y="1536192"/>
-            <a:ext cx="731520" cy="274320"/>
+            <a:off x="2651760" y="1536192"/>
+            <a:ext cx="685800" cy="274320"/>
           </a:xfrm>
           <a:prstGeom prst="rect">
             <a:avLst/>
@@ -17762,23 +17762,23 @@
         </p:nvSpPr>
         <p:spPr>
           <a:xfrm>
-            <a:off x="2779776" y="1554480"/>
-            <a:ext cx="658368" cy="237744"/>
-          </a:xfrm>
-          <a:prstGeom prst="rect">
-            <a:avLst/>
-          </a:prstGeom>
-          <a:noFill/>
-        </p:spPr>
-        <p:txBody>
-          <a:bodyPr wrap="square">
-            <a:spAutoFit/>
-          </a:bodyPr>
-          <a:lstStyle/>
-          <a:p>
-            <a:pPr algn="ctr"/>
-            <a:r>
-              <a:rPr sz="850" b="1" i="0">
+            <a:off x="2688336" y="1554480"/>
+            <a:ext cx="612648" cy="237744"/>
+          </a:xfrm>
+          <a:prstGeom prst="rect">
+            <a:avLst/>
+          </a:prstGeom>
+          <a:noFill/>
+        </p:spPr>
+        <p:txBody>
+          <a:bodyPr wrap="square">
+            <a:spAutoFit/>
+          </a:bodyPr>
+          <a:lstStyle/>
+          <a:p>
+            <a:pPr algn="ctr"/>
+            <a:r>
+              <a:rPr sz="800" b="1" i="0">
                 <a:solidFill>
                   <a:srgbClr val="FFFFFF"/>
                 </a:solidFill>
@@ -17797,7 +17797,7 @@
         </p:nvSpPr>
         <p:spPr>
           <a:xfrm>
-            <a:off x="3474720" y="1536192"/>
+            <a:off x="3337560" y="1536192"/>
             <a:ext cx="640080" cy="274320"/>
           </a:xfrm>
           <a:prstGeom prst="rect">
@@ -17840,7 +17840,7 @@
         </p:nvSpPr>
         <p:spPr>
           <a:xfrm>
-            <a:off x="3511296" y="1554480"/>
+            <a:off x="3374136" y="1554480"/>
             <a:ext cx="566928" cy="237744"/>
           </a:xfrm>
           <a:prstGeom prst="rect">
@@ -17856,7 +17856,7 @@
           <a:p>
             <a:pPr algn="ctr"/>
             <a:r>
-              <a:rPr sz="850" b="1" i="0">
+              <a:rPr sz="800" b="1" i="0">
                 <a:solidFill>
                   <a:srgbClr val="FFFFFF"/>
                 </a:solidFill>
@@ -17875,7 +17875,7 @@
         </p:nvSpPr>
         <p:spPr>
           <a:xfrm>
-            <a:off x="4114800" y="1536192"/>
+            <a:off x="3977639" y="1536192"/>
             <a:ext cx="640080" cy="274320"/>
           </a:xfrm>
           <a:prstGeom prst="rect">
@@ -17918,7 +17918,7 @@
         </p:nvSpPr>
         <p:spPr>
           <a:xfrm>
-            <a:off x="4151376" y="1554480"/>
+            <a:off x="4014215" y="1554480"/>
             <a:ext cx="566928" cy="237744"/>
           </a:xfrm>
           <a:prstGeom prst="rect">
@@ -17934,7 +17934,7 @@
           <a:p>
             <a:pPr algn="ctr"/>
             <a:r>
-              <a:rPr sz="850" b="1" i="0">
+              <a:rPr sz="800" b="1" i="0">
                 <a:solidFill>
                   <a:srgbClr val="FFFFFF"/>
                 </a:solidFill>
@@ -17953,8 +17953,8 @@
         </p:nvSpPr>
         <p:spPr>
           <a:xfrm>
-            <a:off x="4754880" y="1536192"/>
-            <a:ext cx="1188720" cy="274320"/>
+            <a:off x="4617720" y="1536192"/>
+            <a:ext cx="1417320" cy="274320"/>
           </a:xfrm>
           <a:prstGeom prst="rect">
             <a:avLst/>
@@ -17996,29 +17996,29 @@
         </p:nvSpPr>
         <p:spPr>
           <a:xfrm>
-            <a:off x="4791456" y="1554480"/>
-            <a:ext cx="1115568" cy="237744"/>
-          </a:xfrm>
-          <a:prstGeom prst="rect">
-            <a:avLst/>
-          </a:prstGeom>
-          <a:noFill/>
-        </p:spPr>
-        <p:txBody>
-          <a:bodyPr wrap="square">
-            <a:spAutoFit/>
-          </a:bodyPr>
-          <a:lstStyle/>
-          <a:p>
-            <a:pPr algn="ctr"/>
-            <a:r>
-              <a:rPr sz="850" b="1" i="0">
+            <a:off x="4654296" y="1554480"/>
+            <a:ext cx="1344168" cy="237744"/>
+          </a:xfrm>
+          <a:prstGeom prst="rect">
+            <a:avLst/>
+          </a:prstGeom>
+          <a:noFill/>
+        </p:spPr>
+        <p:txBody>
+          <a:bodyPr wrap="square">
+            <a:spAutoFit/>
+          </a:bodyPr>
+          <a:lstStyle/>
+          <a:p>
+            <a:pPr algn="ctr"/>
+            <a:r>
+              <a:rPr sz="800" b="1" i="0">
                 <a:solidFill>
                   <a:srgbClr val="FFFFFF"/>
                 </a:solidFill>
                 <a:latin typeface="Calibri"/>
               </a:rPr>
-              <a:t>Avg Freight</a:t>
+              <a:t>Avg Freight (INR)</a:t>
             </a:r>
           </a:p>
         </p:txBody>
@@ -18031,8 +18031,8 @@
         </p:nvSpPr>
         <p:spPr>
           <a:xfrm>
-            <a:off x="365760" y="1828800"/>
-            <a:ext cx="2377440" cy="429768"/>
+            <a:off x="365760" y="1847088"/>
+            <a:ext cx="2286000" cy="411480"/>
           </a:xfrm>
           <a:prstGeom prst="rect">
             <a:avLst/>
@@ -18074,8 +18074,8 @@
         </p:nvSpPr>
         <p:spPr>
           <a:xfrm>
-            <a:off x="402336" y="1883664"/>
-            <a:ext cx="2304288" cy="320040"/>
+            <a:off x="402336" y="1892807"/>
+            <a:ext cx="2212848" cy="320040"/>
           </a:xfrm>
           <a:prstGeom prst="rect">
             <a:avLst/>
@@ -18109,8 +18109,8 @@
         </p:nvSpPr>
         <p:spPr>
           <a:xfrm>
-            <a:off x="2743200" y="1828800"/>
-            <a:ext cx="731520" cy="429768"/>
+            <a:off x="2651760" y="1847088"/>
+            <a:ext cx="685800" cy="411480"/>
           </a:xfrm>
           <a:prstGeom prst="rect">
             <a:avLst/>
@@ -18152,8 +18152,8 @@
         </p:nvSpPr>
         <p:spPr>
           <a:xfrm>
-            <a:off x="2779776" y="1883664"/>
-            <a:ext cx="658368" cy="320040"/>
+            <a:off x="2688336" y="1892807"/>
+            <a:ext cx="612648" cy="320040"/>
           </a:xfrm>
           <a:prstGeom prst="rect">
             <a:avLst/>
@@ -18187,8 +18187,8 @@
         </p:nvSpPr>
         <p:spPr>
           <a:xfrm>
-            <a:off x="3474720" y="1828800"/>
-            <a:ext cx="640080" cy="429768"/>
+            <a:off x="3337560" y="1847088"/>
+            <a:ext cx="640080" cy="411480"/>
           </a:xfrm>
           <a:prstGeom prst="rect">
             <a:avLst/>
@@ -18230,7 +18230,7 @@
         </p:nvSpPr>
         <p:spPr>
           <a:xfrm>
-            <a:off x="3511296" y="1883664"/>
+            <a:off x="3374136" y="1892807"/>
             <a:ext cx="566928" cy="320040"/>
           </a:xfrm>
           <a:prstGeom prst="rect">
@@ -18265,8 +18265,8 @@
         </p:nvSpPr>
         <p:spPr>
           <a:xfrm>
-            <a:off x="4114800" y="1828800"/>
-            <a:ext cx="640080" cy="429768"/>
+            <a:off x="3977639" y="1847088"/>
+            <a:ext cx="640080" cy="411480"/>
           </a:xfrm>
           <a:prstGeom prst="rect">
             <a:avLst/>
@@ -18308,7 +18308,7 @@
         </p:nvSpPr>
         <p:spPr>
           <a:xfrm>
-            <a:off x="4151376" y="1883664"/>
+            <a:off x="4014215" y="1892807"/>
             <a:ext cx="566928" cy="320040"/>
           </a:xfrm>
           <a:prstGeom prst="rect">
@@ -18343,8 +18343,8 @@
         </p:nvSpPr>
         <p:spPr>
           <a:xfrm>
-            <a:off x="4754880" y="1828800"/>
-            <a:ext cx="1188720" cy="429768"/>
+            <a:off x="4617720" y="1847088"/>
+            <a:ext cx="1417320" cy="411480"/>
           </a:xfrm>
           <a:prstGeom prst="rect">
             <a:avLst/>
@@ -18386,8 +18386,8 @@
         </p:nvSpPr>
         <p:spPr>
           <a:xfrm>
-            <a:off x="4791456" y="1883664"/>
-            <a:ext cx="1115568" cy="320040"/>
+            <a:off x="4654296" y="1892807"/>
+            <a:ext cx="1344168" cy="320040"/>
           </a:xfrm>
           <a:prstGeom prst="rect">
             <a:avLst/>
@@ -18422,7 +18422,7 @@
         <p:spPr>
           <a:xfrm>
             <a:off x="365760" y="2304288"/>
-            <a:ext cx="2377440" cy="429768"/>
+            <a:ext cx="2286000" cy="411480"/>
           </a:xfrm>
           <a:prstGeom prst="rect">
             <a:avLst/>
@@ -18464,8 +18464,8 @@
         </p:nvSpPr>
         <p:spPr>
           <a:xfrm>
-            <a:off x="402336" y="2359152"/>
-            <a:ext cx="2304288" cy="320040"/>
+            <a:off x="402336" y="2350008"/>
+            <a:ext cx="2212848" cy="320040"/>
           </a:xfrm>
           <a:prstGeom prst="rect">
             <a:avLst/>
@@ -18499,8 +18499,8 @@
         </p:nvSpPr>
         <p:spPr>
           <a:xfrm>
-            <a:off x="2743200" y="2304288"/>
-            <a:ext cx="731520" cy="429768"/>
+            <a:off x="2651760" y="2304288"/>
+            <a:ext cx="685800" cy="411480"/>
           </a:xfrm>
           <a:prstGeom prst="rect">
             <a:avLst/>
@@ -18542,8 +18542,8 @@
         </p:nvSpPr>
         <p:spPr>
           <a:xfrm>
-            <a:off x="2779776" y="2359152"/>
-            <a:ext cx="658368" cy="320040"/>
+            <a:off x="2688336" y="2350008"/>
+            <a:ext cx="612648" cy="320040"/>
           </a:xfrm>
           <a:prstGeom prst="rect">
             <a:avLst/>
@@ -18577,8 +18577,8 @@
         </p:nvSpPr>
         <p:spPr>
           <a:xfrm>
-            <a:off x="3474720" y="2304288"/>
-            <a:ext cx="640080" cy="429768"/>
+            <a:off x="3337560" y="2304288"/>
+            <a:ext cx="640080" cy="411480"/>
           </a:xfrm>
           <a:prstGeom prst="rect">
             <a:avLst/>
@@ -18620,7 +18620,7 @@
         </p:nvSpPr>
         <p:spPr>
           <a:xfrm>
-            <a:off x="3511296" y="2359152"/>
+            <a:off x="3374136" y="2350008"/>
             <a:ext cx="566928" cy="320040"/>
           </a:xfrm>
           <a:prstGeom prst="rect">
@@ -18655,8 +18655,8 @@
         </p:nvSpPr>
         <p:spPr>
           <a:xfrm>
-            <a:off x="4114800" y="2304288"/>
-            <a:ext cx="640080" cy="429768"/>
+            <a:off x="3977639" y="2304288"/>
+            <a:ext cx="640080" cy="411480"/>
           </a:xfrm>
           <a:prstGeom prst="rect">
             <a:avLst/>
@@ -18698,7 +18698,7 @@
         </p:nvSpPr>
         <p:spPr>
           <a:xfrm>
-            <a:off x="4151376" y="2359152"/>
+            <a:off x="4014215" y="2350008"/>
             <a:ext cx="566928" cy="320040"/>
           </a:xfrm>
           <a:prstGeom prst="rect">
@@ -18733,8 +18733,8 @@
         </p:nvSpPr>
         <p:spPr>
           <a:xfrm>
-            <a:off x="4754880" y="2304288"/>
-            <a:ext cx="1188720" cy="429768"/>
+            <a:off x="4617720" y="2304288"/>
+            <a:ext cx="1417320" cy="411480"/>
           </a:xfrm>
           <a:prstGeom prst="rect">
             <a:avLst/>
@@ -18776,8 +18776,8 @@
         </p:nvSpPr>
         <p:spPr>
           <a:xfrm>
-            <a:off x="4791456" y="2359152"/>
-            <a:ext cx="1115568" cy="320040"/>
+            <a:off x="4654296" y="2350008"/>
+            <a:ext cx="1344168" cy="320040"/>
           </a:xfrm>
           <a:prstGeom prst="rect">
             <a:avLst/>
@@ -18811,8 +18811,8 @@
         </p:nvSpPr>
         <p:spPr>
           <a:xfrm>
-            <a:off x="365760" y="2779776"/>
-            <a:ext cx="2377440" cy="429768"/>
+            <a:off x="365760" y="2761488"/>
+            <a:ext cx="2286000" cy="411480"/>
           </a:xfrm>
           <a:prstGeom prst="rect">
             <a:avLst/>
@@ -18854,8 +18854,8 @@
         </p:nvSpPr>
         <p:spPr>
           <a:xfrm>
-            <a:off x="402336" y="2834640"/>
-            <a:ext cx="2304288" cy="320040"/>
+            <a:off x="402336" y="2807208"/>
+            <a:ext cx="2212848" cy="320040"/>
           </a:xfrm>
           <a:prstGeom prst="rect">
             <a:avLst/>
@@ -18889,8 +18889,8 @@
         </p:nvSpPr>
         <p:spPr>
           <a:xfrm>
-            <a:off x="2743200" y="2779776"/>
-            <a:ext cx="731520" cy="429768"/>
+            <a:off x="2651760" y="2761488"/>
+            <a:ext cx="685800" cy="411480"/>
           </a:xfrm>
           <a:prstGeom prst="rect">
             <a:avLst/>
@@ -18932,8 +18932,8 @@
         </p:nvSpPr>
         <p:spPr>
           <a:xfrm>
-            <a:off x="2779776" y="2834640"/>
-            <a:ext cx="658368" cy="320040"/>
+            <a:off x="2688336" y="2807208"/>
+            <a:ext cx="612648" cy="320040"/>
           </a:xfrm>
           <a:prstGeom prst="rect">
             <a:avLst/>
@@ -18967,8 +18967,8 @@
         </p:nvSpPr>
         <p:spPr>
           <a:xfrm>
-            <a:off x="3474720" y="2779776"/>
-            <a:ext cx="640080" cy="429768"/>
+            <a:off x="3337560" y="2761488"/>
+            <a:ext cx="640080" cy="411480"/>
           </a:xfrm>
           <a:prstGeom prst="rect">
             <a:avLst/>
@@ -19010,7 +19010,7 @@
         </p:nvSpPr>
         <p:spPr>
           <a:xfrm>
-            <a:off x="3511296" y="2834640"/>
+            <a:off x="3374136" y="2807208"/>
             <a:ext cx="566928" cy="320040"/>
           </a:xfrm>
           <a:prstGeom prst="rect">
@@ -19045,8 +19045,8 @@
         </p:nvSpPr>
         <p:spPr>
           <a:xfrm>
-            <a:off x="4114800" y="2779776"/>
-            <a:ext cx="640080" cy="429768"/>
+            <a:off x="3977639" y="2761488"/>
+            <a:ext cx="640080" cy="411480"/>
           </a:xfrm>
           <a:prstGeom prst="rect">
             <a:avLst/>
@@ -19088,7 +19088,7 @@
         </p:nvSpPr>
         <p:spPr>
           <a:xfrm>
-            <a:off x="4151376" y="2834640"/>
+            <a:off x="4014215" y="2807208"/>
             <a:ext cx="566928" cy="320040"/>
           </a:xfrm>
           <a:prstGeom prst="rect">
@@ -19123,8 +19123,8 @@
         </p:nvSpPr>
         <p:spPr>
           <a:xfrm>
-            <a:off x="4754880" y="2779776"/>
-            <a:ext cx="1188720" cy="429768"/>
+            <a:off x="4617720" y="2761488"/>
+            <a:ext cx="1417320" cy="411480"/>
           </a:xfrm>
           <a:prstGeom prst="rect">
             <a:avLst/>
@@ -19166,8 +19166,8 @@
         </p:nvSpPr>
         <p:spPr>
           <a:xfrm>
-            <a:off x="4791456" y="2834640"/>
-            <a:ext cx="1115568" cy="320040"/>
+            <a:off x="4654296" y="2807208"/>
+            <a:ext cx="1344168" cy="320040"/>
           </a:xfrm>
           <a:prstGeom prst="rect">
             <a:avLst/>
@@ -19201,8 +19201,8 @@
         </p:nvSpPr>
         <p:spPr>
           <a:xfrm>
-            <a:off x="365760" y="3255264"/>
-            <a:ext cx="2377440" cy="429768"/>
+            <a:off x="365760" y="3218688"/>
+            <a:ext cx="2286000" cy="411480"/>
           </a:xfrm>
           <a:prstGeom prst="rect">
             <a:avLst/>
@@ -19244,8 +19244,8 @@
         </p:nvSpPr>
         <p:spPr>
           <a:xfrm>
-            <a:off x="402336" y="3310128"/>
-            <a:ext cx="2304288" cy="320040"/>
+            <a:off x="402336" y="3264408"/>
+            <a:ext cx="2212848" cy="320040"/>
           </a:xfrm>
           <a:prstGeom prst="rect">
             <a:avLst/>
@@ -19279,8 +19279,8 @@
         </p:nvSpPr>
         <p:spPr>
           <a:xfrm>
-            <a:off x="2743200" y="3255264"/>
-            <a:ext cx="731520" cy="429768"/>
+            <a:off x="2651760" y="3218688"/>
+            <a:ext cx="685800" cy="411480"/>
           </a:xfrm>
           <a:prstGeom prst="rect">
             <a:avLst/>
@@ -19322,8 +19322,8 @@
         </p:nvSpPr>
         <p:spPr>
           <a:xfrm>
-            <a:off x="2779776" y="3310128"/>
-            <a:ext cx="658368" cy="320040"/>
+            <a:off x="2688336" y="3264408"/>
+            <a:ext cx="612648" cy="320040"/>
           </a:xfrm>
           <a:prstGeom prst="rect">
             <a:avLst/>
@@ -19357,8 +19357,8 @@
         </p:nvSpPr>
         <p:spPr>
           <a:xfrm>
-            <a:off x="3474720" y="3255264"/>
-            <a:ext cx="640080" cy="429768"/>
+            <a:off x="3337560" y="3218688"/>
+            <a:ext cx="640080" cy="411480"/>
           </a:xfrm>
           <a:prstGeom prst="rect">
             <a:avLst/>
@@ -19400,7 +19400,7 @@
         </p:nvSpPr>
         <p:spPr>
           <a:xfrm>
-            <a:off x="3511296" y="3310128"/>
+            <a:off x="3374136" y="3264408"/>
             <a:ext cx="566928" cy="320040"/>
           </a:xfrm>
           <a:prstGeom prst="rect">
@@ -19435,8 +19435,8 @@
         </p:nvSpPr>
         <p:spPr>
           <a:xfrm>
-            <a:off x="4114800" y="3255264"/>
-            <a:ext cx="640080" cy="429768"/>
+            <a:off x="3977639" y="3218688"/>
+            <a:ext cx="640080" cy="411480"/>
           </a:xfrm>
           <a:prstGeom prst="rect">
             <a:avLst/>
@@ -19478,7 +19478,7 @@
         </p:nvSpPr>
         <p:spPr>
           <a:xfrm>
-            <a:off x="4151376" y="3310128"/>
+            <a:off x="4014215" y="3264408"/>
             <a:ext cx="566928" cy="320040"/>
           </a:xfrm>
           <a:prstGeom prst="rect">
@@ -19513,8 +19513,8 @@
         </p:nvSpPr>
         <p:spPr>
           <a:xfrm>
-            <a:off x="4754880" y="3255264"/>
-            <a:ext cx="1188720" cy="429768"/>
+            <a:off x="4617720" y="3218688"/>
+            <a:ext cx="1417320" cy="411480"/>
           </a:xfrm>
           <a:prstGeom prst="rect">
             <a:avLst/>
@@ -19556,8 +19556,8 @@
         </p:nvSpPr>
         <p:spPr>
           <a:xfrm>
-            <a:off x="4791456" y="3310128"/>
-            <a:ext cx="1115568" cy="320040"/>
+            <a:off x="4654296" y="3264408"/>
+            <a:ext cx="1344168" cy="320040"/>
           </a:xfrm>
           <a:prstGeom prst="rect">
             <a:avLst/>
@@ -19591,8 +19591,8 @@
         </p:nvSpPr>
         <p:spPr>
           <a:xfrm>
-            <a:off x="6309360" y="1234440"/>
-            <a:ext cx="5486400" cy="256032"/>
+            <a:off x="6217920" y="1234440"/>
+            <a:ext cx="5760720" cy="256032"/>
           </a:xfrm>
           <a:prstGeom prst="rect">
             <a:avLst/>
@@ -19607,13 +19607,13 @@
           <a:p>
             <a:pPr algn="l"/>
             <a:r>
-              <a:rPr sz="1200" b="1" i="0">
+              <a:rPr sz="1100" b="1" i="0">
                 <a:solidFill>
                   <a:srgbClr val="1F3864"/>
                 </a:solidFill>
                 <a:latin typeface="Calibri"/>
               </a:rPr>
-              <a:t>Average Lead Time by Region</a:t>
+              <a:t>Avg Lead Time by Region (Days)</a:t>
             </a:r>
           </a:p>
         </p:txBody>
@@ -19626,8 +19626,8 @@
         </p:nvSpPr>
         <p:spPr>
           <a:xfrm>
-            <a:off x="6309360" y="1536192"/>
-            <a:ext cx="3657600" cy="530352"/>
+            <a:off x="6217920" y="1536192"/>
+            <a:ext cx="2377440" cy="530352"/>
           </a:xfrm>
           <a:prstGeom prst="rect">
             <a:avLst/>
@@ -19669,8 +19669,8 @@
         </p:nvSpPr>
         <p:spPr>
           <a:xfrm>
-            <a:off x="6355080" y="1627632"/>
-            <a:ext cx="2011680" cy="347472"/>
+            <a:off x="6263640" y="1627632"/>
+            <a:ext cx="2286000" cy="347472"/>
           </a:xfrm>
           <a:prstGeom prst="rect">
             <a:avLst/>
@@ -19704,8 +19704,8 @@
         </p:nvSpPr>
         <p:spPr>
           <a:xfrm>
-            <a:off x="8321040" y="1627632"/>
-            <a:ext cx="3200400" cy="347472"/>
+            <a:off x="8686800" y="1627632"/>
+            <a:ext cx="3840480" cy="347472"/>
           </a:xfrm>
           <a:prstGeom prst="rect">
             <a:avLst/>
@@ -19747,8 +19747,8 @@
         </p:nvSpPr>
         <p:spPr>
           <a:xfrm>
-            <a:off x="11567160" y="1645919"/>
-            <a:ext cx="731520" cy="310896"/>
+            <a:off x="11612880" y="1645919"/>
+            <a:ext cx="502920" cy="310896"/>
           </a:xfrm>
           <a:prstGeom prst="rect">
             <a:avLst/>
@@ -19782,8 +19782,8 @@
         </p:nvSpPr>
         <p:spPr>
           <a:xfrm>
-            <a:off x="6309360" y="2194560"/>
-            <a:ext cx="3657600" cy="530352"/>
+            <a:off x="6217920" y="2194560"/>
+            <a:ext cx="2377440" cy="530352"/>
           </a:xfrm>
           <a:prstGeom prst="rect">
             <a:avLst/>
@@ -19825,8 +19825,8 @@
         </p:nvSpPr>
         <p:spPr>
           <a:xfrm>
-            <a:off x="6355080" y="2286000"/>
-            <a:ext cx="2011680" cy="347472"/>
+            <a:off x="6263640" y="2286000"/>
+            <a:ext cx="2286000" cy="347472"/>
           </a:xfrm>
           <a:prstGeom prst="rect">
             <a:avLst/>
@@ -19860,8 +19860,8 @@
         </p:nvSpPr>
         <p:spPr>
           <a:xfrm>
-            <a:off x="8321040" y="2286000"/>
-            <a:ext cx="2615159" cy="347472"/>
+            <a:off x="8686800" y="2286000"/>
+            <a:ext cx="3138191" cy="347472"/>
           </a:xfrm>
           <a:prstGeom prst="rect">
             <a:avLst/>
@@ -19903,8 +19903,8 @@
         </p:nvSpPr>
         <p:spPr>
           <a:xfrm>
-            <a:off x="10981919" y="2304288"/>
-            <a:ext cx="731520" cy="310896"/>
+            <a:off x="11612880" y="2304288"/>
+            <a:ext cx="502920" cy="310896"/>
           </a:xfrm>
           <a:prstGeom prst="rect">
             <a:avLst/>
@@ -19938,8 +19938,8 @@
         </p:nvSpPr>
         <p:spPr>
           <a:xfrm>
-            <a:off x="6309360" y="2852928"/>
-            <a:ext cx="3657600" cy="530352"/>
+            <a:off x="6217920" y="2852928"/>
+            <a:ext cx="2377440" cy="530352"/>
           </a:xfrm>
           <a:prstGeom prst="rect">
             <a:avLst/>
@@ -19981,8 +19981,8 @@
         </p:nvSpPr>
         <p:spPr>
           <a:xfrm>
-            <a:off x="6355080" y="2944368"/>
-            <a:ext cx="2011680" cy="347472"/>
+            <a:off x="6263640" y="2944368"/>
+            <a:ext cx="2286000" cy="347472"/>
           </a:xfrm>
           <a:prstGeom prst="rect">
             <a:avLst/>
@@ -20016,8 +20016,8 @@
         </p:nvSpPr>
         <p:spPr>
           <a:xfrm>
-            <a:off x="8321040" y="2944368"/>
-            <a:ext cx="2573786" cy="347472"/>
+            <a:off x="8686800" y="2944368"/>
+            <a:ext cx="3088543" cy="347472"/>
           </a:xfrm>
           <a:prstGeom prst="rect">
             <a:avLst/>
@@ -20059,8 +20059,8 @@
         </p:nvSpPr>
         <p:spPr>
           <a:xfrm>
-            <a:off x="10940546" y="2962656"/>
-            <a:ext cx="731520" cy="310896"/>
+            <a:off x="11612880" y="2962656"/>
+            <a:ext cx="502920" cy="310896"/>
           </a:xfrm>
           <a:prstGeom prst="rect">
             <a:avLst/>
@@ -20094,8 +20094,8 @@
         </p:nvSpPr>
         <p:spPr>
           <a:xfrm>
-            <a:off x="6309360" y="3511296"/>
-            <a:ext cx="3657600" cy="530352"/>
+            <a:off x="6217920" y="3511296"/>
+            <a:ext cx="2377440" cy="530352"/>
           </a:xfrm>
           <a:prstGeom prst="rect">
             <a:avLst/>
@@ -20137,8 +20137,8 @@
         </p:nvSpPr>
         <p:spPr>
           <a:xfrm>
-            <a:off x="6355080" y="3602736"/>
-            <a:ext cx="2011680" cy="347472"/>
+            <a:off x="6263640" y="3602736"/>
+            <a:ext cx="2286000" cy="347472"/>
           </a:xfrm>
           <a:prstGeom prst="rect">
             <a:avLst/>
@@ -20172,8 +20172,8 @@
         </p:nvSpPr>
         <p:spPr>
           <a:xfrm>
-            <a:off x="8321040" y="3602736"/>
-            <a:ext cx="2088280" cy="347472"/>
+            <a:off x="8686800" y="3602736"/>
+            <a:ext cx="2505936" cy="347472"/>
           </a:xfrm>
           <a:prstGeom prst="rect">
             <a:avLst/>
@@ -20215,8 +20215,8 @@
         </p:nvSpPr>
         <p:spPr>
           <a:xfrm>
-            <a:off x="10455040" y="3621024"/>
-            <a:ext cx="731520" cy="310896"/>
+            <a:off x="11238456" y="3621024"/>
+            <a:ext cx="502920" cy="310896"/>
           </a:xfrm>
           <a:prstGeom prst="rect">
             <a:avLst/>
@@ -20250,8 +20250,8 @@
         </p:nvSpPr>
         <p:spPr>
           <a:xfrm>
-            <a:off x="6309360" y="4169663"/>
-            <a:ext cx="3657600" cy="530352"/>
+            <a:off x="6217920" y="4169663"/>
+            <a:ext cx="2377440" cy="530352"/>
           </a:xfrm>
           <a:prstGeom prst="rect">
             <a:avLst/>
@@ -20293,8 +20293,8 @@
         </p:nvSpPr>
         <p:spPr>
           <a:xfrm>
-            <a:off x="6355080" y="4261103"/>
-            <a:ext cx="2011680" cy="347472"/>
+            <a:off x="6263640" y="4261103"/>
+            <a:ext cx="2286000" cy="347472"/>
           </a:xfrm>
           <a:prstGeom prst="rect">
             <a:avLst/>
@@ -20328,8 +20328,8 @@
         </p:nvSpPr>
         <p:spPr>
           <a:xfrm>
-            <a:off x="8321040" y="4261103"/>
-            <a:ext cx="2050530" cy="347472"/>
+            <a:off x="8686800" y="4261103"/>
+            <a:ext cx="2460636" cy="347472"/>
           </a:xfrm>
           <a:prstGeom prst="rect">
             <a:avLst/>
@@ -20371,8 +20371,8 @@
         </p:nvSpPr>
         <p:spPr>
           <a:xfrm>
-            <a:off x="10417290" y="4279392"/>
-            <a:ext cx="731520" cy="310896"/>
+            <a:off x="11193156" y="4279392"/>
+            <a:ext cx="502920" cy="310896"/>
           </a:xfrm>
           <a:prstGeom prst="rect">
             <a:avLst/>
@@ -20406,8 +20406,8 @@
         </p:nvSpPr>
         <p:spPr>
           <a:xfrm>
-            <a:off x="365760" y="4023360"/>
-            <a:ext cx="11430000" cy="256032"/>
+            <a:off x="365760" y="4754880"/>
+            <a:ext cx="11612880" cy="256032"/>
           </a:xfrm>
           <a:prstGeom prst="rect">
             <a:avLst/>
@@ -20422,7 +20422,7 @@
           <a:p>
             <a:pPr algn="l"/>
             <a:r>
-              <a:rPr sz="1200" b="1" i="0">
+              <a:rPr sz="1100" b="1" i="0">
                 <a:solidFill>
                   <a:srgbClr val="1F3864"/>
                 </a:solidFill>
@@ -20441,8 +20441,8 @@
         </p:nvSpPr>
         <p:spPr>
           <a:xfrm>
-            <a:off x="365760" y="4315968"/>
-            <a:ext cx="11430000" cy="1920240"/>
+            <a:off x="365760" y="5047488"/>
+            <a:ext cx="11612880" cy="1600200"/>
           </a:xfrm>
           <a:prstGeom prst="rect">
             <a:avLst/>
@@ -20484,8 +20484,8 @@
         </p:nvSpPr>
         <p:spPr>
           <a:xfrm>
-            <a:off x="457200" y="4389120"/>
-            <a:ext cx="11247120" cy="1828800"/>
+            <a:off x="457200" y="5120640"/>
+            <a:ext cx="11430000" cy="1508760"/>
           </a:xfrm>
           <a:prstGeom prst="rect">
             <a:avLst/>
@@ -20510,7 +20510,7 @@
                 </a:solidFill>
                 <a:latin typeface="Calibri"/>
               </a:rPr>
-              <a:t>  •  Air Freight has 1-day lead time but costs 3x more than Road — recommended only for urgent/high-value orders</a:t>
+              <a:t>  •  Air Freight has 1-day lead time but costs 3x more than Road — use only for urgent/high-value orders</a:t>
             </a:r>
           </a:p>
           <a:p>
@@ -20526,7 +20526,7 @@
                 </a:solidFill>
                 <a:latin typeface="Calibri"/>
               </a:rPr>
-              <a:t>  •  East India consistently shows highest lead times (5–7 days) — hub consolidation recommended in Kolkata</a:t>
+              <a:t>  •  East India has highest avg lead time (5–7 days) — Kolkata hub consolidation recommended</a:t>
             </a:r>
           </a:p>
           <a:p>
@@ -20542,7 +20542,7 @@
                 </a:solidFill>
                 <a:latin typeface="Calibri"/>
               </a:rPr>
-              <a:t>  •  Road (Truck) handles 55% of shipments — optimizing truck routing could cut freight cost by 12–18%</a:t>
+              <a:t>  •  Road (Truck) handles 55% of shipments — route optimization could cut freight cost by 12–18%</a:t>
             </a:r>
           </a:p>
           <a:p>
@@ -20558,7 +20558,7 @@
                 </a:solidFill>
                 <a:latin typeface="Calibri"/>
               </a:rPr>
-              <a:t>  •  Rail Freight underutilized at 15% — expanding rail for bulk lager SKUs could save INR 15–20L annually</a:t>
+              <a:t>  •  Rail Freight underutilized at 15% — expanding to bulk Lager SKUs could save INR 15–20L/yr</a:t>
             </a:r>
           </a:p>
         </p:txBody>
@@ -21744,7 +21744,7 @@
         <p:spPr>
           <a:xfrm>
             <a:off x="365760" y="3429000"/>
-            <a:ext cx="5486400" cy="256032"/>
+            <a:ext cx="5303520" cy="256032"/>
           </a:xfrm>
           <a:prstGeom prst="rect">
             <a:avLst/>
@@ -21765,7 +21765,7 @@
                 </a:solidFill>
                 <a:latin typeface="Calibri"/>
               </a:rPr>
-              <a:t>OTIF by Channel</a:t>
+              <a:t>OTIF by Distribution Channel</a:t>
             </a:r>
           </a:p>
         </p:txBody>
@@ -21778,8 +21778,8 @@
         </p:nvSpPr>
         <p:spPr>
           <a:xfrm>
-            <a:off x="365760" y="3730752"/>
-            <a:ext cx="2651760" cy="914400"/>
+            <a:off x="365760" y="3794760"/>
+            <a:ext cx="2468880" cy="1051560"/>
           </a:xfrm>
           <a:prstGeom prst="rect">
             <a:avLst/>
@@ -21821,23 +21821,23 @@
         </p:nvSpPr>
         <p:spPr>
           <a:xfrm>
-            <a:off x="457200" y="3767328"/>
-            <a:ext cx="2468880" cy="347472"/>
-          </a:xfrm>
-          <a:prstGeom prst="rect">
-            <a:avLst/>
-          </a:prstGeom>
-          <a:noFill/>
-        </p:spPr>
-        <p:txBody>
-          <a:bodyPr wrap="square">
-            <a:spAutoFit/>
-          </a:bodyPr>
-          <a:lstStyle/>
-          <a:p>
-            <a:pPr algn="ctr"/>
-            <a:r>
-              <a:rPr sz="900" b="1" i="0">
+            <a:off x="457200" y="3886200"/>
+            <a:ext cx="2286000" cy="320040"/>
+          </a:xfrm>
+          <a:prstGeom prst="rect">
+            <a:avLst/>
+          </a:prstGeom>
+          <a:noFill/>
+        </p:spPr>
+        <p:txBody>
+          <a:bodyPr wrap="square">
+            <a:spAutoFit/>
+          </a:bodyPr>
+          <a:lstStyle/>
+          <a:p>
+            <a:pPr algn="ctr"/>
+            <a:r>
+              <a:rPr sz="950" b="1" i="0">
                 <a:solidFill>
                   <a:srgbClr val="FFFFFF"/>
                 </a:solidFill>
@@ -21856,23 +21856,23 @@
         </p:nvSpPr>
         <p:spPr>
           <a:xfrm>
-            <a:off x="457200" y="4096512"/>
-            <a:ext cx="2468880" cy="438912"/>
-          </a:xfrm>
-          <a:prstGeom prst="rect">
-            <a:avLst/>
-          </a:prstGeom>
-          <a:noFill/>
-        </p:spPr>
-        <p:txBody>
-          <a:bodyPr wrap="square">
-            <a:spAutoFit/>
-          </a:bodyPr>
-          <a:lstStyle/>
-          <a:p>
-            <a:pPr algn="ctr"/>
-            <a:r>
-              <a:rPr sz="2000" b="1" i="0">
+            <a:off x="457200" y="4206240"/>
+            <a:ext cx="2286000" cy="502920"/>
+          </a:xfrm>
+          <a:prstGeom prst="rect">
+            <a:avLst/>
+          </a:prstGeom>
+          <a:noFill/>
+        </p:spPr>
+        <p:txBody>
+          <a:bodyPr wrap="square">
+            <a:spAutoFit/>
+          </a:bodyPr>
+          <a:lstStyle/>
+          <a:p>
+            <a:pPr algn="ctr"/>
+            <a:r>
+              <a:rPr sz="2200" b="1" i="0">
                 <a:solidFill>
                   <a:srgbClr val="FFFFFF"/>
                 </a:solidFill>
@@ -21891,8 +21891,8 @@
         </p:nvSpPr>
         <p:spPr>
           <a:xfrm>
-            <a:off x="3200400" y="3730752"/>
-            <a:ext cx="2651760" cy="914400"/>
+            <a:off x="3017520" y="3794760"/>
+            <a:ext cx="2468880" cy="1051560"/>
           </a:xfrm>
           <a:prstGeom prst="rect">
             <a:avLst/>
@@ -21934,23 +21934,23 @@
         </p:nvSpPr>
         <p:spPr>
           <a:xfrm>
-            <a:off x="3291840" y="3767328"/>
-            <a:ext cx="2468880" cy="347472"/>
-          </a:xfrm>
-          <a:prstGeom prst="rect">
-            <a:avLst/>
-          </a:prstGeom>
-          <a:noFill/>
-        </p:spPr>
-        <p:txBody>
-          <a:bodyPr wrap="square">
-            <a:spAutoFit/>
-          </a:bodyPr>
-          <a:lstStyle/>
-          <a:p>
-            <a:pPr algn="ctr"/>
-            <a:r>
-              <a:rPr sz="900" b="1" i="0">
+            <a:off x="3108960" y="3886200"/>
+            <a:ext cx="2286000" cy="320040"/>
+          </a:xfrm>
+          <a:prstGeom prst="rect">
+            <a:avLst/>
+          </a:prstGeom>
+          <a:noFill/>
+        </p:spPr>
+        <p:txBody>
+          <a:bodyPr wrap="square">
+            <a:spAutoFit/>
+          </a:bodyPr>
+          <a:lstStyle/>
+          <a:p>
+            <a:pPr algn="ctr"/>
+            <a:r>
+              <a:rPr sz="950" b="1" i="0">
                 <a:solidFill>
                   <a:srgbClr val="FFFFFF"/>
                 </a:solidFill>
@@ -21969,23 +21969,23 @@
         </p:nvSpPr>
         <p:spPr>
           <a:xfrm>
-            <a:off x="3291840" y="4096512"/>
-            <a:ext cx="2468880" cy="438912"/>
-          </a:xfrm>
-          <a:prstGeom prst="rect">
-            <a:avLst/>
-          </a:prstGeom>
-          <a:noFill/>
-        </p:spPr>
-        <p:txBody>
-          <a:bodyPr wrap="square">
-            <a:spAutoFit/>
-          </a:bodyPr>
-          <a:lstStyle/>
-          <a:p>
-            <a:pPr algn="ctr"/>
-            <a:r>
-              <a:rPr sz="2000" b="1" i="0">
+            <a:off x="3108960" y="4206240"/>
+            <a:ext cx="2286000" cy="502920"/>
+          </a:xfrm>
+          <a:prstGeom prst="rect">
+            <a:avLst/>
+          </a:prstGeom>
+          <a:noFill/>
+        </p:spPr>
+        <p:txBody>
+          <a:bodyPr wrap="square">
+            <a:spAutoFit/>
+          </a:bodyPr>
+          <a:lstStyle/>
+          <a:p>
+            <a:pPr algn="ctr"/>
+            <a:r>
+              <a:rPr sz="2200" b="1" i="0">
                 <a:solidFill>
                   <a:srgbClr val="FFFFFF"/>
                 </a:solidFill>
@@ -22004,8 +22004,8 @@
         </p:nvSpPr>
         <p:spPr>
           <a:xfrm>
-            <a:off x="6035040" y="3730752"/>
-            <a:ext cx="2651760" cy="914400"/>
+            <a:off x="365760" y="4983480"/>
+            <a:ext cx="2468880" cy="1051560"/>
           </a:xfrm>
           <a:prstGeom prst="rect">
             <a:avLst/>
@@ -22047,23 +22047,23 @@
         </p:nvSpPr>
         <p:spPr>
           <a:xfrm>
-            <a:off x="6126480" y="3767328"/>
-            <a:ext cx="2468880" cy="347472"/>
-          </a:xfrm>
-          <a:prstGeom prst="rect">
-            <a:avLst/>
-          </a:prstGeom>
-          <a:noFill/>
-        </p:spPr>
-        <p:txBody>
-          <a:bodyPr wrap="square">
-            <a:spAutoFit/>
-          </a:bodyPr>
-          <a:lstStyle/>
-          <a:p>
-            <a:pPr algn="ctr"/>
-            <a:r>
-              <a:rPr sz="900" b="1" i="0">
+            <a:off x="457200" y="5074920"/>
+            <a:ext cx="2286000" cy="320040"/>
+          </a:xfrm>
+          <a:prstGeom prst="rect">
+            <a:avLst/>
+          </a:prstGeom>
+          <a:noFill/>
+        </p:spPr>
+        <p:txBody>
+          <a:bodyPr wrap="square">
+            <a:spAutoFit/>
+          </a:bodyPr>
+          <a:lstStyle/>
+          <a:p>
+            <a:pPr algn="ctr"/>
+            <a:r>
+              <a:rPr sz="950" b="1" i="0">
                 <a:solidFill>
                   <a:srgbClr val="FFFFFF"/>
                 </a:solidFill>
@@ -22082,23 +22082,23 @@
         </p:nvSpPr>
         <p:spPr>
           <a:xfrm>
-            <a:off x="6126480" y="4096512"/>
-            <a:ext cx="2468880" cy="438912"/>
-          </a:xfrm>
-          <a:prstGeom prst="rect">
-            <a:avLst/>
-          </a:prstGeom>
-          <a:noFill/>
-        </p:spPr>
-        <p:txBody>
-          <a:bodyPr wrap="square">
-            <a:spAutoFit/>
-          </a:bodyPr>
-          <a:lstStyle/>
-          <a:p>
-            <a:pPr algn="ctr"/>
-            <a:r>
-              <a:rPr sz="2000" b="1" i="0">
+            <a:off x="457200" y="5394960"/>
+            <a:ext cx="2286000" cy="502920"/>
+          </a:xfrm>
+          <a:prstGeom prst="rect">
+            <a:avLst/>
+          </a:prstGeom>
+          <a:noFill/>
+        </p:spPr>
+        <p:txBody>
+          <a:bodyPr wrap="square">
+            <a:spAutoFit/>
+          </a:bodyPr>
+          <a:lstStyle/>
+          <a:p>
+            <a:pPr algn="ctr"/>
+            <a:r>
+              <a:rPr sz="2200" b="1" i="0">
                 <a:solidFill>
                   <a:srgbClr val="FFFFFF"/>
                 </a:solidFill>
@@ -22117,8 +22117,8 @@
         </p:nvSpPr>
         <p:spPr>
           <a:xfrm>
-            <a:off x="8869680" y="3730752"/>
-            <a:ext cx="2651760" cy="914400"/>
+            <a:off x="3017520" y="4983480"/>
+            <a:ext cx="2468880" cy="1051560"/>
           </a:xfrm>
           <a:prstGeom prst="rect">
             <a:avLst/>
@@ -22160,23 +22160,23 @@
         </p:nvSpPr>
         <p:spPr>
           <a:xfrm>
-            <a:off x="8961120" y="3767328"/>
-            <a:ext cx="2468880" cy="347472"/>
-          </a:xfrm>
-          <a:prstGeom prst="rect">
-            <a:avLst/>
-          </a:prstGeom>
-          <a:noFill/>
-        </p:spPr>
-        <p:txBody>
-          <a:bodyPr wrap="square">
-            <a:spAutoFit/>
-          </a:bodyPr>
-          <a:lstStyle/>
-          <a:p>
-            <a:pPr algn="ctr"/>
-            <a:r>
-              <a:rPr sz="900" b="1" i="0">
+            <a:off x="3108960" y="5074920"/>
+            <a:ext cx="2286000" cy="320040"/>
+          </a:xfrm>
+          <a:prstGeom prst="rect">
+            <a:avLst/>
+          </a:prstGeom>
+          <a:noFill/>
+        </p:spPr>
+        <p:txBody>
+          <a:bodyPr wrap="square">
+            <a:spAutoFit/>
+          </a:bodyPr>
+          <a:lstStyle/>
+          <a:p>
+            <a:pPr algn="ctr"/>
+            <a:r>
+              <a:rPr sz="950" b="1" i="0">
                 <a:solidFill>
                   <a:srgbClr val="FFFFFF"/>
                 </a:solidFill>
@@ -22195,23 +22195,23 @@
         </p:nvSpPr>
         <p:spPr>
           <a:xfrm>
-            <a:off x="8961120" y="4096512"/>
-            <a:ext cx="2468880" cy="438912"/>
-          </a:xfrm>
-          <a:prstGeom prst="rect">
-            <a:avLst/>
-          </a:prstGeom>
-          <a:noFill/>
-        </p:spPr>
-        <p:txBody>
-          <a:bodyPr wrap="square">
-            <a:spAutoFit/>
-          </a:bodyPr>
-          <a:lstStyle/>
-          <a:p>
-            <a:pPr algn="ctr"/>
-            <a:r>
-              <a:rPr sz="2000" b="1" i="0">
+            <a:off x="3108960" y="5394960"/>
+            <a:ext cx="2286000" cy="502920"/>
+          </a:xfrm>
+          <a:prstGeom prst="rect">
+            <a:avLst/>
+          </a:prstGeom>
+          <a:noFill/>
+        </p:spPr>
+        <p:txBody>
+          <a:bodyPr wrap="square">
+            <a:spAutoFit/>
+          </a:bodyPr>
+          <a:lstStyle/>
+          <a:p>
+            <a:pPr algn="ctr"/>
+            <a:r>
+              <a:rPr sz="2200" b="1" i="0">
                 <a:solidFill>
                   <a:srgbClr val="FFFFFF"/>
                 </a:solidFill>
@@ -22231,7 +22231,7 @@
         <p:spPr>
           <a:xfrm>
             <a:off x="6035040" y="3429000"/>
-            <a:ext cx="5943600" cy="256032"/>
+            <a:ext cx="5669280" cy="256032"/>
           </a:xfrm>
           <a:prstGeom prst="rect">
             <a:avLst/>
@@ -22265,8 +22265,8 @@
         </p:nvSpPr>
         <p:spPr>
           <a:xfrm>
-            <a:off x="6035040" y="3730752"/>
-            <a:ext cx="3657600" cy="438912"/>
+            <a:off x="6035040" y="3794760"/>
+            <a:ext cx="2651760" cy="420624"/>
           </a:xfrm>
           <a:prstGeom prst="rect">
             <a:avLst/>
@@ -22308,8 +22308,8 @@
         </p:nvSpPr>
         <p:spPr>
           <a:xfrm>
-            <a:off x="6080760" y="3803904"/>
-            <a:ext cx="2743200" cy="292608"/>
+            <a:off x="6080760" y="3849624"/>
+            <a:ext cx="2560320" cy="310896"/>
           </a:xfrm>
           <a:prstGeom prst="rect">
             <a:avLst/>
@@ -22324,7 +22324,7 @@
           <a:p>
             <a:pPr algn="l"/>
             <a:r>
-              <a:rPr sz="900" b="0" i="0">
+              <a:rPr sz="850" b="0" i="0">
                 <a:solidFill>
                   <a:srgbClr val="262626"/>
                 </a:solidFill>
@@ -22343,8 +22343,8 @@
         </p:nvSpPr>
         <p:spPr>
           <a:xfrm>
-            <a:off x="8869680" y="3803904"/>
-            <a:ext cx="1120139" cy="292608"/>
+            <a:off x="8778240" y="3849624"/>
+            <a:ext cx="1840229" cy="310896"/>
           </a:xfrm>
           <a:prstGeom prst="rect">
             <a:avLst/>
@@ -22386,8 +22386,8 @@
         </p:nvSpPr>
         <p:spPr>
           <a:xfrm>
-            <a:off x="9235440" y="3803904"/>
-            <a:ext cx="640080" cy="292608"/>
+            <a:off x="10664190" y="3849624"/>
+            <a:ext cx="548640" cy="310896"/>
           </a:xfrm>
           <a:prstGeom prst="rect">
             <a:avLst/>
@@ -22402,7 +22402,7 @@
           <a:p>
             <a:pPr algn="l"/>
             <a:r>
-              <a:rPr sz="900" b="1" i="0">
+              <a:rPr sz="850" b="1" i="0">
                 <a:solidFill>
                   <a:srgbClr val="1F3864"/>
                 </a:solidFill>
@@ -22421,8 +22421,8 @@
         </p:nvSpPr>
         <p:spPr>
           <a:xfrm>
-            <a:off x="6035040" y="4261104"/>
-            <a:ext cx="3657600" cy="438912"/>
+            <a:off x="6035040" y="4288536"/>
+            <a:ext cx="2651760" cy="420624"/>
           </a:xfrm>
           <a:prstGeom prst="rect">
             <a:avLst/>
@@ -22464,8 +22464,8 @@
         </p:nvSpPr>
         <p:spPr>
           <a:xfrm>
-            <a:off x="6080760" y="4334256"/>
-            <a:ext cx="2743200" cy="292608"/>
+            <a:off x="6080760" y="4343400"/>
+            <a:ext cx="2560320" cy="310896"/>
           </a:xfrm>
           <a:prstGeom prst="rect">
             <a:avLst/>
@@ -22480,7 +22480,7 @@
           <a:p>
             <a:pPr algn="l"/>
             <a:r>
-              <a:rPr sz="900" b="0" i="0">
+              <a:rPr sz="850" b="0" i="0">
                 <a:solidFill>
                   <a:srgbClr val="262626"/>
                 </a:solidFill>
@@ -22499,8 +22499,8 @@
         </p:nvSpPr>
         <p:spPr>
           <a:xfrm>
-            <a:off x="8869680" y="4334256"/>
-            <a:ext cx="896112" cy="292608"/>
+            <a:off x="8778240" y="4343400"/>
+            <a:ext cx="1472184" cy="310896"/>
           </a:xfrm>
           <a:prstGeom prst="rect">
             <a:avLst/>
@@ -22542,8 +22542,8 @@
         </p:nvSpPr>
         <p:spPr>
           <a:xfrm>
-            <a:off x="9235440" y="4334256"/>
-            <a:ext cx="640080" cy="292608"/>
+            <a:off x="10296144" y="4343400"/>
+            <a:ext cx="548640" cy="310896"/>
           </a:xfrm>
           <a:prstGeom prst="rect">
             <a:avLst/>
@@ -22558,7 +22558,7 @@
           <a:p>
             <a:pPr algn="l"/>
             <a:r>
-              <a:rPr sz="900" b="1" i="0">
+              <a:rPr sz="850" b="1" i="0">
                 <a:solidFill>
                   <a:srgbClr val="1F3864"/>
                 </a:solidFill>
@@ -22577,8 +22577,8 @@
         </p:nvSpPr>
         <p:spPr>
           <a:xfrm>
-            <a:off x="6035040" y="4791456"/>
-            <a:ext cx="3657600" cy="438912"/>
+            <a:off x="6035040" y="4782312"/>
+            <a:ext cx="2651760" cy="420624"/>
           </a:xfrm>
           <a:prstGeom prst="rect">
             <a:avLst/>
@@ -22620,8 +22620,8 @@
         </p:nvSpPr>
         <p:spPr>
           <a:xfrm>
-            <a:off x="6080760" y="4864608"/>
-            <a:ext cx="2743200" cy="292608"/>
+            <a:off x="6080760" y="4837176"/>
+            <a:ext cx="2560320" cy="310896"/>
           </a:xfrm>
           <a:prstGeom prst="rect">
             <a:avLst/>
@@ -22636,7 +22636,7 @@
           <a:p>
             <a:pPr algn="l"/>
             <a:r>
-              <a:rPr sz="900" b="0" i="0">
+              <a:rPr sz="850" b="0" i="0">
                 <a:solidFill>
                   <a:srgbClr val="262626"/>
                 </a:solidFill>
@@ -22655,8 +22655,8 @@
         </p:nvSpPr>
         <p:spPr>
           <a:xfrm>
-            <a:off x="8869680" y="4864608"/>
-            <a:ext cx="576072" cy="292608"/>
+            <a:off x="8778240" y="4837176"/>
+            <a:ext cx="946403" cy="310896"/>
           </a:xfrm>
           <a:prstGeom prst="rect">
             <a:avLst/>
@@ -22698,8 +22698,8 @@
         </p:nvSpPr>
         <p:spPr>
           <a:xfrm>
-            <a:off x="9235440" y="4864608"/>
-            <a:ext cx="640080" cy="292608"/>
+            <a:off x="9770364" y="4837176"/>
+            <a:ext cx="548640" cy="310896"/>
           </a:xfrm>
           <a:prstGeom prst="rect">
             <a:avLst/>
@@ -22714,7 +22714,7 @@
           <a:p>
             <a:pPr algn="l"/>
             <a:r>
-              <a:rPr sz="900" b="1" i="0">
+              <a:rPr sz="850" b="1" i="0">
                 <a:solidFill>
                   <a:srgbClr val="1F3864"/>
                 </a:solidFill>
@@ -22733,8 +22733,8 @@
         </p:nvSpPr>
         <p:spPr>
           <a:xfrm>
-            <a:off x="6035040" y="5321808"/>
-            <a:ext cx="3657600" cy="438912"/>
+            <a:off x="6035040" y="5276088"/>
+            <a:ext cx="2651760" cy="420624"/>
           </a:xfrm>
           <a:prstGeom prst="rect">
             <a:avLst/>
@@ -22776,8 +22776,8 @@
         </p:nvSpPr>
         <p:spPr>
           <a:xfrm>
-            <a:off x="6080760" y="5394960"/>
-            <a:ext cx="2743200" cy="292608"/>
+            <a:off x="6080760" y="5330952"/>
+            <a:ext cx="2560320" cy="310896"/>
           </a:xfrm>
           <a:prstGeom prst="rect">
             <a:avLst/>
@@ -22792,7 +22792,7 @@
           <a:p>
             <a:pPr algn="l"/>
             <a:r>
-              <a:rPr sz="900" b="0" i="0">
+              <a:rPr sz="850" b="0" i="0">
                 <a:solidFill>
                   <a:srgbClr val="262626"/>
                 </a:solidFill>
@@ -22811,8 +22811,8 @@
         </p:nvSpPr>
         <p:spPr>
           <a:xfrm>
-            <a:off x="8869680" y="5394960"/>
-            <a:ext cx="384048" cy="292608"/>
+            <a:off x="8778240" y="5330952"/>
+            <a:ext cx="630936" cy="310896"/>
           </a:xfrm>
           <a:prstGeom prst="rect">
             <a:avLst/>
@@ -22854,8 +22854,8 @@
         </p:nvSpPr>
         <p:spPr>
           <a:xfrm>
-            <a:off x="9235440" y="5394960"/>
-            <a:ext cx="640080" cy="292608"/>
+            <a:off x="9454896" y="5330952"/>
+            <a:ext cx="548640" cy="310896"/>
           </a:xfrm>
           <a:prstGeom prst="rect">
             <a:avLst/>
@@ -22870,7 +22870,7 @@
           <a:p>
             <a:pPr algn="l"/>
             <a:r>
-              <a:rPr sz="900" b="1" i="0">
+              <a:rPr sz="850" b="1" i="0">
                 <a:solidFill>
                   <a:srgbClr val="1F3864"/>
                 </a:solidFill>
@@ -22889,8 +22889,8 @@
         </p:nvSpPr>
         <p:spPr>
           <a:xfrm>
-            <a:off x="6035040" y="5852160"/>
-            <a:ext cx="3657600" cy="438912"/>
+            <a:off x="6035040" y="5769864"/>
+            <a:ext cx="2651760" cy="420624"/>
           </a:xfrm>
           <a:prstGeom prst="rect">
             <a:avLst/>
@@ -22932,8 +22932,8 @@
         </p:nvSpPr>
         <p:spPr>
           <a:xfrm>
-            <a:off x="6080760" y="5925312"/>
-            <a:ext cx="2743200" cy="292608"/>
+            <a:off x="6080760" y="5824728"/>
+            <a:ext cx="2560320" cy="310896"/>
           </a:xfrm>
           <a:prstGeom prst="rect">
             <a:avLst/>
@@ -22948,7 +22948,7 @@
           <a:p>
             <a:pPr algn="l"/>
             <a:r>
-              <a:rPr sz="900" b="0" i="0">
+              <a:rPr sz="850" b="0" i="0">
                 <a:solidFill>
                   <a:srgbClr val="262626"/>
                 </a:solidFill>
@@ -22967,8 +22967,8 @@
         </p:nvSpPr>
         <p:spPr>
           <a:xfrm>
-            <a:off x="8869680" y="5925312"/>
-            <a:ext cx="224028" cy="292608"/>
+            <a:off x="8778240" y="5824728"/>
+            <a:ext cx="368046" cy="310896"/>
           </a:xfrm>
           <a:prstGeom prst="rect">
             <a:avLst/>
@@ -23010,8 +23010,8 @@
         </p:nvSpPr>
         <p:spPr>
           <a:xfrm>
-            <a:off x="9235440" y="5925312"/>
-            <a:ext cx="640080" cy="292608"/>
+            <a:off x="9192006" y="5824728"/>
+            <a:ext cx="548640" cy="310896"/>
           </a:xfrm>
           <a:prstGeom prst="rect">
             <a:avLst/>
@@ -23026,7 +23026,7 @@
           <a:p>
             <a:pPr algn="l"/>
             <a:r>
-              <a:rPr sz="900" b="1" i="0">
+              <a:rPr sz="850" b="1" i="0">
                 <a:solidFill>
                   <a:srgbClr val="1F3864"/>
                 </a:solidFill>

--- a/powerpoint/BeerFlow_Strategy_Deck.pptx
+++ b/powerpoint/BeerFlow_Strategy_Deck.pptx
@@ -13672,7 +13672,7 @@
                 </a:solidFill>
                 <a:latin typeface="Calibri"/>
               </a:rPr>
-              <a:t>4.2%</a:t>
+              <a:t>3.9%</a:t>
             </a:r>
           </a:p>
         </p:txBody>
@@ -13984,7 +13984,7 @@
                 </a:solidFill>
                 <a:latin typeface="Calibri"/>
               </a:rPr>
-              <a:t>3.4%</a:t>
+              <a:t>4.7%</a:t>
             </a:r>
           </a:p>
         </p:txBody>
@@ -14296,7 +14296,7 @@
                 </a:solidFill>
                 <a:latin typeface="Calibri"/>
               </a:rPr>
-              <a:t>2.9%</a:t>
+              <a:t>3.4%</a:t>
             </a:r>
           </a:p>
         </p:txBody>
@@ -14608,7 +14608,7 @@
                 </a:solidFill>
                 <a:latin typeface="Calibri"/>
               </a:rPr>
-              <a:t>4.8%</a:t>
+              <a:t>3.5%</a:t>
             </a:r>
           </a:p>
         </p:txBody>
@@ -14920,7 +14920,7 @@
                 </a:solidFill>
                 <a:latin typeface="Calibri"/>
               </a:rPr>
-              <a:t>4.1%</a:t>
+              <a:t>3.4%</a:t>
             </a:r>
           </a:p>
         </p:txBody>
@@ -15232,7 +15232,7 @@
                 </a:solidFill>
                 <a:latin typeface="Calibri"/>
               </a:rPr>
-              <a:t>3.4%</a:t>
+              <a:t>4.8%</a:t>
             </a:r>
           </a:p>
         </p:txBody>
@@ -15544,7 +15544,7 @@
                 </a:solidFill>
                 <a:latin typeface="Calibri"/>
               </a:rPr>
-              <a:t>3.6%</a:t>
+              <a:t>3.4%</a:t>
             </a:r>
           </a:p>
         </p:txBody>
@@ -16907,7 +16907,7 @@
                 </a:solidFill>
                 <a:latin typeface="Calibri"/>
               </a:rPr>
-              <a:t>25 SKU-Warehouse Combos</a:t>
+              <a:t>23 SKU-Warehouse Combos</a:t>
             </a:r>
           </a:p>
         </p:txBody>
@@ -17203,7 +17203,7 @@
                 </a:solidFill>
                 <a:latin typeface="Calibri"/>
               </a:rPr>
-              <a:t>7 SKU-Warehouse Combos</a:t>
+              <a:t>9 SKU-Warehouse Combos</a:t>
             </a:r>
           </a:p>
         </p:txBody>
@@ -18174,7 +18174,7 @@
                 </a:solidFill>
                 <a:latin typeface="Calibri"/>
               </a:rPr>
-              <a:t>102</a:t>
+              <a:t>98</a:t>
             </a:r>
           </a:p>
         </p:txBody>
@@ -18252,7 +18252,7 @@
                 </a:solidFill>
                 <a:latin typeface="Calibri"/>
               </a:rPr>
-              <a:t>2.4d</a:t>
+              <a:t>2.0d</a:t>
             </a:r>
           </a:p>
         </p:txBody>
@@ -18330,7 +18330,7 @@
                 </a:solidFill>
                 <a:latin typeface="Calibri"/>
               </a:rPr>
-              <a:t>56.9%</a:t>
+              <a:t>85.7%</a:t>
             </a:r>
           </a:p>
         </p:txBody>
@@ -18408,7 +18408,7 @@
                 </a:solidFill>
                 <a:latin typeface="Calibri"/>
               </a:rPr>
-              <a:t>INR 571</a:t>
+              <a:t>INR 559</a:t>
             </a:r>
           </a:p>
         </p:txBody>
@@ -18564,7 +18564,7 @@
                 </a:solidFill>
                 <a:latin typeface="Calibri"/>
               </a:rPr>
-              <a:t>483</a:t>
+              <a:t>528</a:t>
             </a:r>
           </a:p>
         </p:txBody>
@@ -18642,7 +18642,7 @@
                 </a:solidFill>
                 <a:latin typeface="Calibri"/>
               </a:rPr>
-              <a:t>3.3d</a:t>
+              <a:t>2.8d</a:t>
             </a:r>
           </a:p>
         </p:txBody>
@@ -18720,7 +18720,7 @@
                 </a:solidFill>
                 <a:latin typeface="Calibri"/>
               </a:rPr>
-              <a:t>29.0%</a:t>
+              <a:t>82.8%</a:t>
             </a:r>
           </a:p>
         </p:txBody>
@@ -18798,7 +18798,7 @@
                 </a:solidFill>
                 <a:latin typeface="Calibri"/>
               </a:rPr>
-              <a:t>INR 547</a:t>
+              <a:t>INR 530</a:t>
             </a:r>
           </a:p>
         </p:txBody>
@@ -18954,7 +18954,7 @@
                 </a:solidFill>
                 <a:latin typeface="Calibri"/>
               </a:rPr>
-              <a:t>1118</a:t>
+              <a:t>1062</a:t>
             </a:r>
           </a:p>
         </p:txBody>
@@ -19032,7 +19032,7 @@
                 </a:solidFill>
                 <a:latin typeface="Calibri"/>
               </a:rPr>
-              <a:t>4.3d</a:t>
+              <a:t>3.8d</a:t>
             </a:r>
           </a:p>
         </p:txBody>
@@ -19110,7 +19110,7 @@
                 </a:solidFill>
                 <a:latin typeface="Calibri"/>
               </a:rPr>
-              <a:t>8.9%</a:t>
+              <a:t>84.7%</a:t>
             </a:r>
           </a:p>
         </p:txBody>
@@ -19344,7 +19344,7 @@
                 </a:solidFill>
                 <a:latin typeface="Calibri"/>
               </a:rPr>
-              <a:t>297</a:t>
+              <a:t>312</a:t>
             </a:r>
           </a:p>
         </p:txBody>
@@ -19422,7 +19422,7 @@
                 </a:solidFill>
                 <a:latin typeface="Calibri"/>
               </a:rPr>
-              <a:t>6.3d</a:t>
+              <a:t>5.9d</a:t>
             </a:r>
           </a:p>
         </p:txBody>
@@ -19500,7 +19500,7 @@
                 </a:solidFill>
                 <a:latin typeface="Calibri"/>
               </a:rPr>
-              <a:t>0.0%</a:t>
+              <a:t>79.2%</a:t>
             </a:r>
           </a:p>
         </p:txBody>
@@ -19578,7 +19578,7 @@
                 </a:solidFill>
                 <a:latin typeface="Calibri"/>
               </a:rPr>
-              <a:t>INR 529</a:t>
+              <a:t>INR 500</a:t>
             </a:r>
           </a:p>
         </p:txBody>
@@ -19769,7 +19769,7 @@
                 </a:solidFill>
                 <a:latin typeface="Calibri"/>
               </a:rPr>
-              <a:t>5.4d</a:t>
+              <a:t>5.1d</a:t>
             </a:r>
           </a:p>
         </p:txBody>
@@ -19847,7 +19847,7 @@
                 </a:solidFill>
                 <a:latin typeface="Calibri"/>
               </a:rPr>
-              <a:t>South India</a:t>
+              <a:t>Central India</a:t>
             </a:r>
           </a:p>
         </p:txBody>
@@ -19861,7 +19861,7 @@
         <p:spPr>
           <a:xfrm>
             <a:off x="8686800" y="2286000"/>
-            <a:ext cx="3138191" cy="347472"/>
+            <a:ext cx="3071521" cy="347472"/>
           </a:xfrm>
           <a:prstGeom prst="rect">
             <a:avLst/>
@@ -19925,7 +19925,7 @@
                 </a:solidFill>
                 <a:latin typeface="Calibri"/>
               </a:rPr>
-              <a:t>4.4d</a:t>
+              <a:t>4.1d</a:t>
             </a:r>
           </a:p>
         </p:txBody>
@@ -20003,7 +20003,7 @@
                 </a:solidFill>
                 <a:latin typeface="Calibri"/>
               </a:rPr>
-              <a:t>Central India</a:t>
+              <a:t>South India</a:t>
             </a:r>
           </a:p>
         </p:txBody>
@@ -20017,7 +20017,7 @@
         <p:spPr>
           <a:xfrm>
             <a:off x="8686800" y="2944368"/>
-            <a:ext cx="3088543" cy="347472"/>
+            <a:ext cx="3020836" cy="347472"/>
           </a:xfrm>
           <a:prstGeom prst="rect">
             <a:avLst/>
@@ -20081,7 +20081,7 @@
                 </a:solidFill>
                 <a:latin typeface="Calibri"/>
               </a:rPr>
-              <a:t>4.4d</a:t>
+              <a:t>4.0d</a:t>
             </a:r>
           </a:p>
         </p:txBody>
@@ -20173,13 +20173,13 @@
         <p:spPr>
           <a:xfrm>
             <a:off x="8686800" y="3602736"/>
-            <a:ext cx="2505936" cy="347472"/>
+            <a:ext cx="2290323" cy="347472"/>
           </a:xfrm>
           <a:prstGeom prst="rect">
             <a:avLst/>
           </a:prstGeom>
           <a:solidFill>
-            <a:srgbClr val="FFC000"/>
+            <a:srgbClr val="375623"/>
           </a:solidFill>
           <a:ln>
             <a:noFill/>
@@ -20215,7 +20215,7 @@
         </p:nvSpPr>
         <p:spPr>
           <a:xfrm>
-            <a:off x="11238456" y="3621024"/>
+            <a:off x="11022843" y="3621024"/>
             <a:ext cx="502920" cy="310896"/>
           </a:xfrm>
           <a:prstGeom prst="rect">
@@ -20237,7 +20237,7 @@
                 </a:solidFill>
                 <a:latin typeface="Calibri"/>
               </a:rPr>
-              <a:t>3.5d</a:t>
+              <a:t>3.0d</a:t>
             </a:r>
           </a:p>
         </p:txBody>
@@ -20329,7 +20329,7 @@
         <p:spPr>
           <a:xfrm>
             <a:off x="8686800" y="4261103"/>
-            <a:ext cx="2460636" cy="347472"/>
+            <a:ext cx="2264118" cy="347472"/>
           </a:xfrm>
           <a:prstGeom prst="rect">
             <a:avLst/>
@@ -20371,7 +20371,7 @@
         </p:nvSpPr>
         <p:spPr>
           <a:xfrm>
-            <a:off x="11193156" y="4279392"/>
+            <a:off x="10996638" y="4279392"/>
             <a:ext cx="502920" cy="310896"/>
           </a:xfrm>
           <a:prstGeom prst="rect">
@@ -20393,7 +20393,7 @@
                 </a:solidFill>
                 <a:latin typeface="Calibri"/>
               </a:rPr>
-              <a:t>3.5d</a:t>
+              <a:t>3.0d</a:t>
             </a:r>
           </a:p>
         </p:txBody>
@@ -20745,8 +20745,8 @@
         </p:nvSpPr>
         <p:spPr>
           <a:xfrm>
-            <a:off x="365760" y="1234440"/>
-            <a:ext cx="3200400" cy="2011680"/>
+            <a:off x="457200" y="1234440"/>
+            <a:ext cx="3291840" cy="2331720"/>
           </a:xfrm>
           <a:prstGeom prst="rect">
             <a:avLst/>
@@ -20788,8 +20788,8 @@
         </p:nvSpPr>
         <p:spPr>
           <a:xfrm>
-            <a:off x="457200" y="1298448"/>
-            <a:ext cx="3017520" cy="320040"/>
+            <a:off x="548640" y="1325880"/>
+            <a:ext cx="3108960" cy="274320"/>
           </a:xfrm>
           <a:prstGeom prst="rect">
             <a:avLst/>
@@ -20823,29 +20823,29 @@
         </p:nvSpPr>
         <p:spPr>
           <a:xfrm>
-            <a:off x="457200" y="1627632"/>
-            <a:ext cx="3017520" cy="777240"/>
-          </a:xfrm>
-          <a:prstGeom prst="rect">
-            <a:avLst/>
-          </a:prstGeom>
-          <a:noFill/>
-        </p:spPr>
-        <p:txBody>
-          <a:bodyPr wrap="square">
-            <a:spAutoFit/>
-          </a:bodyPr>
-          <a:lstStyle/>
-          <a:p>
-            <a:pPr algn="ctr"/>
-            <a:r>
-              <a:rPr sz="4200" b="1" i="0">
+            <a:off x="548640" y="1645920"/>
+            <a:ext cx="3108960" cy="777240"/>
+          </a:xfrm>
+          <a:prstGeom prst="rect">
+            <a:avLst/>
+          </a:prstGeom>
+          <a:noFill/>
+        </p:spPr>
+        <p:txBody>
+          <a:bodyPr wrap="square">
+            <a:spAutoFit/>
+          </a:bodyPr>
+          <a:lstStyle/>
+          <a:p>
+            <a:pPr algn="ctr"/>
+            <a:r>
+              <a:rPr sz="4400" b="1" i="0">
                 <a:solidFill>
                   <a:srgbClr val="FFC000"/>
                 </a:solidFill>
                 <a:latin typeface="Calibri"/>
               </a:rPr>
-              <a:t>14.9%</a:t>
+              <a:t>83.4%</a:t>
             </a:r>
           </a:p>
         </p:txBody>
@@ -20858,29 +20858,29 @@
         </p:nvSpPr>
         <p:spPr>
           <a:xfrm>
-            <a:off x="457200" y="2395728"/>
-            <a:ext cx="3017520" cy="320040"/>
-          </a:xfrm>
-          <a:prstGeom prst="rect">
-            <a:avLst/>
-          </a:prstGeom>
-          <a:noFill/>
-        </p:spPr>
-        <p:txBody>
-          <a:bodyPr wrap="square">
-            <a:spAutoFit/>
-          </a:bodyPr>
-          <a:lstStyle/>
-          <a:p>
-            <a:pPr algn="ctr"/>
-            <a:r>
-              <a:rPr sz="900" b="1" i="0">
-                <a:solidFill>
-                  <a:srgbClr val="C00000"/>
-                </a:solidFill>
-                <a:latin typeface="Calibri"/>
-              </a:rPr>
-              <a:t>Target: 90%+  |  NEEDS IMPROVEMENT</a:t>
+            <a:off x="548640" y="2514600"/>
+            <a:ext cx="3108960" cy="274320"/>
+          </a:xfrm>
+          <a:prstGeom prst="rect">
+            <a:avLst/>
+          </a:prstGeom>
+          <a:noFill/>
+        </p:spPr>
+        <p:txBody>
+          <a:bodyPr wrap="square">
+            <a:spAutoFit/>
+          </a:bodyPr>
+          <a:lstStyle/>
+          <a:p>
+            <a:pPr algn="ctr"/>
+            <a:r>
+              <a:rPr sz="950" b="1" i="0">
+                <a:solidFill>
+                  <a:srgbClr val="FFC000"/>
+                </a:solidFill>
+                <a:latin typeface="Calibri"/>
+              </a:rPr>
+              <a:t>Target: 90%+  |  ACCEPTABLE</a:t>
             </a:r>
           </a:p>
         </p:txBody>
@@ -20893,8 +20893,8 @@
         </p:nvSpPr>
         <p:spPr>
           <a:xfrm>
-            <a:off x="457200" y="2697480"/>
-            <a:ext cx="3017520" cy="320040"/>
+            <a:off x="548640" y="2788920"/>
+            <a:ext cx="3108960" cy="228600"/>
           </a:xfrm>
           <a:prstGeom prst="rect">
             <a:avLst/>
@@ -20915,7 +20915,7 @@
                 </a:solidFill>
                 <a:latin typeface="Calibri"/>
               </a:rPr>
-              <a:t>Gap of 75.1% to target</a:t>
+              <a:t>Gap to industry benchmark: 6.6%</a:t>
             </a:r>
           </a:p>
         </p:txBody>
@@ -20928,8 +20928,43 @@
         </p:nvSpPr>
         <p:spPr>
           <a:xfrm>
-            <a:off x="3840480" y="1234440"/>
-            <a:ext cx="8046720" cy="256032"/>
+            <a:off x="548640" y="3154680"/>
+            <a:ext cx="3108960" cy="228600"/>
+          </a:xfrm>
+          <a:prstGeom prst="rect">
+            <a:avLst/>
+          </a:prstGeom>
+          <a:noFill/>
+        </p:spPr>
+        <p:txBody>
+          <a:bodyPr wrap="square">
+            <a:spAutoFit/>
+          </a:bodyPr>
+          <a:lstStyle/>
+          <a:p>
+            <a:pPr algn="ctr"/>
+            <a:r>
+              <a:rPr sz="750" b="0" i="0">
+                <a:solidFill>
+                  <a:srgbClr val="FFFFFF"/>
+                </a:solidFill>
+                <a:latin typeface="Calibri"/>
+              </a:rPr>
+              <a:t>Baseline Indian FMCG Beverage Avg: ~78-85%</a:t>
+            </a:r>
+          </a:p>
+        </p:txBody>
+      </p:sp>
+      <p:sp>
+        <p:nvSpPr>
+          <p:cNvPr id="11" name="TextBox 10"/>
+          <p:cNvSpPr txBox="1"/>
+          <p:nvPr/>
+        </p:nvSpPr>
+        <p:spPr>
+          <a:xfrm>
+            <a:off x="4023360" y="1234440"/>
+            <a:ext cx="7680960" cy="256032"/>
           </a:xfrm>
           <a:prstGeom prst="rect">
             <a:avLst/>
@@ -20944,27 +20979,27 @@
           <a:p>
             <a:pPr algn="l"/>
             <a:r>
-              <a:rPr sz="1200" b="1" i="0">
+              <a:rPr sz="1100" b="1" i="0">
                 <a:solidFill>
                   <a:srgbClr val="1F3864"/>
                 </a:solidFill>
                 <a:latin typeface="Calibri"/>
               </a:rPr>
-              <a:t>OTIF Rate by Region</a:t>
-            </a:r>
-          </a:p>
-        </p:txBody>
-      </p:sp>
-      <p:sp>
-        <p:nvSpPr>
-          <p:cNvPr id="11" name="Rectangle 10"/>
+              <a:t>OTIF Rate by Region (%)</a:t>
+            </a:r>
+          </a:p>
+        </p:txBody>
+      </p:sp>
+      <p:sp>
+        <p:nvSpPr>
+          <p:cNvPr id="12" name="Rectangle 11"/>
           <p:cNvSpPr/>
           <p:nvPr/>
         </p:nvSpPr>
         <p:spPr>
           <a:xfrm>
-            <a:off x="3840480" y="1536192"/>
-            <a:ext cx="2560320" cy="530352"/>
+            <a:off x="4023360" y="1554480"/>
+            <a:ext cx="2194560" cy="329184"/>
           </a:xfrm>
           <a:prstGeom prst="rect">
             <a:avLst/>
@@ -21000,14 +21035,14 @@
       </p:sp>
       <p:sp>
         <p:nvSpPr>
-          <p:cNvPr id="12" name="TextBox 11"/>
-          <p:cNvSpPr txBox="1"/>
-          <p:nvPr/>
-        </p:nvSpPr>
-        <p:spPr>
-          <a:xfrm>
-            <a:off x="3886200" y="1627632"/>
-            <a:ext cx="2468880" cy="347472"/>
+          <p:cNvPr id="13" name="TextBox 12"/>
+          <p:cNvSpPr txBox="1"/>
+          <p:nvPr/>
+        </p:nvSpPr>
+        <p:spPr>
+          <a:xfrm>
+            <a:off x="4069080" y="1600200"/>
+            <a:ext cx="2103120" cy="237744"/>
           </a:xfrm>
           <a:prstGeom prst="rect">
             <a:avLst/>
@@ -21022,12 +21057,636 @@
           <a:p>
             <a:pPr algn="l"/>
             <a:r>
-              <a:rPr sz="900" b="0" i="0">
+              <a:rPr sz="850" b="0" i="0">
                 <a:solidFill>
                   <a:srgbClr val="262626"/>
                 </a:solidFill>
                 <a:latin typeface="Calibri"/>
               </a:rPr>
+              <a:t>West India</a:t>
+            </a:r>
+          </a:p>
+        </p:txBody>
+      </p:sp>
+      <p:sp>
+        <p:nvSpPr>
+          <p:cNvPr id="14" name="Rectangle 13"/>
+          <p:cNvSpPr/>
+          <p:nvPr/>
+        </p:nvSpPr>
+        <p:spPr>
+          <a:xfrm>
+            <a:off x="6309360" y="1554480"/>
+            <a:ext cx="3717584" cy="329184"/>
+          </a:xfrm>
+          <a:prstGeom prst="rect">
+            <a:avLst/>
+          </a:prstGeom>
+          <a:solidFill>
+            <a:srgbClr val="FFC000"/>
+          </a:solidFill>
+          <a:ln>
+            <a:noFill/>
+          </a:ln>
+        </p:spPr>
+        <p:style>
+          <a:lnRef idx="1">
+            <a:schemeClr val="accent1"/>
+          </a:lnRef>
+          <a:fillRef idx="3">
+            <a:schemeClr val="accent1"/>
+          </a:fillRef>
+          <a:effectRef idx="2">
+            <a:schemeClr val="accent1"/>
+          </a:effectRef>
+          <a:fontRef idx="minor">
+            <a:schemeClr val="lt1"/>
+          </a:fontRef>
+        </p:style>
+        <p:txBody>
+          <a:bodyPr rtlCol="0" anchor="ctr"/>
+          <a:lstStyle/>
+          <a:p>
+            <a:pPr algn="ctr"/>
+          </a:p>
+        </p:txBody>
+      </p:sp>
+      <p:sp>
+        <p:nvSpPr>
+          <p:cNvPr id="15" name="TextBox 14"/>
+          <p:cNvSpPr txBox="1"/>
+          <p:nvPr/>
+        </p:nvSpPr>
+        <p:spPr>
+          <a:xfrm>
+            <a:off x="10072664" y="1600200"/>
+            <a:ext cx="731520" cy="237744"/>
+          </a:xfrm>
+          <a:prstGeom prst="rect">
+            <a:avLst/>
+          </a:prstGeom>
+          <a:noFill/>
+        </p:spPr>
+        <p:txBody>
+          <a:bodyPr wrap="square">
+            <a:spAutoFit/>
+          </a:bodyPr>
+          <a:lstStyle/>
+          <a:p>
+            <a:pPr algn="l"/>
+            <a:r>
+              <a:rPr sz="850" b="1" i="0">
+                <a:solidFill>
+                  <a:srgbClr val="1F3864"/>
+                </a:solidFill>
+                <a:latin typeface="Calibri"/>
+              </a:rPr>
+              <a:t>84.7%</a:t>
+            </a:r>
+          </a:p>
+        </p:txBody>
+      </p:sp>
+      <p:sp>
+        <p:nvSpPr>
+          <p:cNvPr id="16" name="Rectangle 15"/>
+          <p:cNvSpPr/>
+          <p:nvPr/>
+        </p:nvSpPr>
+        <p:spPr>
+          <a:xfrm>
+            <a:off x="4023360" y="1956816"/>
+            <a:ext cx="2194560" cy="329184"/>
+          </a:xfrm>
+          <a:prstGeom prst="rect">
+            <a:avLst/>
+          </a:prstGeom>
+          <a:solidFill>
+            <a:srgbClr val="F2F2F2"/>
+          </a:solidFill>
+          <a:ln>
+            <a:noFill/>
+          </a:ln>
+        </p:spPr>
+        <p:style>
+          <a:lnRef idx="1">
+            <a:schemeClr val="accent1"/>
+          </a:lnRef>
+          <a:fillRef idx="3">
+            <a:schemeClr val="accent1"/>
+          </a:fillRef>
+          <a:effectRef idx="2">
+            <a:schemeClr val="accent1"/>
+          </a:effectRef>
+          <a:fontRef idx="minor">
+            <a:schemeClr val="lt1"/>
+          </a:fontRef>
+        </p:style>
+        <p:txBody>
+          <a:bodyPr rtlCol="0" anchor="ctr"/>
+          <a:lstStyle/>
+          <a:p>
+            <a:pPr algn="ctr"/>
+          </a:p>
+        </p:txBody>
+      </p:sp>
+      <p:sp>
+        <p:nvSpPr>
+          <p:cNvPr id="17" name="TextBox 16"/>
+          <p:cNvSpPr txBox="1"/>
+          <p:nvPr/>
+        </p:nvSpPr>
+        <p:spPr>
+          <a:xfrm>
+            <a:off x="4069080" y="2002536"/>
+            <a:ext cx="2103120" cy="237744"/>
+          </a:xfrm>
+          <a:prstGeom prst="rect">
+            <a:avLst/>
+          </a:prstGeom>
+          <a:noFill/>
+        </p:spPr>
+        <p:txBody>
+          <a:bodyPr wrap="square">
+            <a:spAutoFit/>
+          </a:bodyPr>
+          <a:lstStyle/>
+          <a:p>
+            <a:pPr algn="l"/>
+            <a:r>
+              <a:rPr sz="850" b="0" i="0">
+                <a:solidFill>
+                  <a:srgbClr val="262626"/>
+                </a:solidFill>
+                <a:latin typeface="Calibri"/>
+              </a:rPr>
+              <a:t>North India</a:t>
+            </a:r>
+          </a:p>
+        </p:txBody>
+      </p:sp>
+      <p:sp>
+        <p:nvSpPr>
+          <p:cNvPr id="18" name="Rectangle 17"/>
+          <p:cNvSpPr/>
+          <p:nvPr/>
+        </p:nvSpPr>
+        <p:spPr>
+          <a:xfrm>
+            <a:off x="6309360" y="1956816"/>
+            <a:ext cx="3669304" cy="329184"/>
+          </a:xfrm>
+          <a:prstGeom prst="rect">
+            <a:avLst/>
+          </a:prstGeom>
+          <a:solidFill>
+            <a:srgbClr val="FFC000"/>
+          </a:solidFill>
+          <a:ln>
+            <a:noFill/>
+          </a:ln>
+        </p:spPr>
+        <p:style>
+          <a:lnRef idx="1">
+            <a:schemeClr val="accent1"/>
+          </a:lnRef>
+          <a:fillRef idx="3">
+            <a:schemeClr val="accent1"/>
+          </a:fillRef>
+          <a:effectRef idx="2">
+            <a:schemeClr val="accent1"/>
+          </a:effectRef>
+          <a:fontRef idx="minor">
+            <a:schemeClr val="lt1"/>
+          </a:fontRef>
+        </p:style>
+        <p:txBody>
+          <a:bodyPr rtlCol="0" anchor="ctr"/>
+          <a:lstStyle/>
+          <a:p>
+            <a:pPr algn="ctr"/>
+          </a:p>
+        </p:txBody>
+      </p:sp>
+      <p:sp>
+        <p:nvSpPr>
+          <p:cNvPr id="19" name="TextBox 18"/>
+          <p:cNvSpPr txBox="1"/>
+          <p:nvPr/>
+        </p:nvSpPr>
+        <p:spPr>
+          <a:xfrm>
+            <a:off x="10024384" y="2002536"/>
+            <a:ext cx="731520" cy="237744"/>
+          </a:xfrm>
+          <a:prstGeom prst="rect">
+            <a:avLst/>
+          </a:prstGeom>
+          <a:noFill/>
+        </p:spPr>
+        <p:txBody>
+          <a:bodyPr wrap="square">
+            <a:spAutoFit/>
+          </a:bodyPr>
+          <a:lstStyle/>
+          <a:p>
+            <a:pPr algn="l"/>
+            <a:r>
+              <a:rPr sz="850" b="1" i="0">
+                <a:solidFill>
+                  <a:srgbClr val="1F3864"/>
+                </a:solidFill>
+                <a:latin typeface="Calibri"/>
+              </a:rPr>
+              <a:t>83.6%</a:t>
+            </a:r>
+          </a:p>
+        </p:txBody>
+      </p:sp>
+      <p:sp>
+        <p:nvSpPr>
+          <p:cNvPr id="20" name="Rectangle 19"/>
+          <p:cNvSpPr/>
+          <p:nvPr/>
+        </p:nvSpPr>
+        <p:spPr>
+          <a:xfrm>
+            <a:off x="4023360" y="2359152"/>
+            <a:ext cx="2194560" cy="329184"/>
+          </a:xfrm>
+          <a:prstGeom prst="rect">
+            <a:avLst/>
+          </a:prstGeom>
+          <a:solidFill>
+            <a:srgbClr val="F2F2F2"/>
+          </a:solidFill>
+          <a:ln>
+            <a:noFill/>
+          </a:ln>
+        </p:spPr>
+        <p:style>
+          <a:lnRef idx="1">
+            <a:schemeClr val="accent1"/>
+          </a:lnRef>
+          <a:fillRef idx="3">
+            <a:schemeClr val="accent1"/>
+          </a:fillRef>
+          <a:effectRef idx="2">
+            <a:schemeClr val="accent1"/>
+          </a:effectRef>
+          <a:fontRef idx="minor">
+            <a:schemeClr val="lt1"/>
+          </a:fontRef>
+        </p:style>
+        <p:txBody>
+          <a:bodyPr rtlCol="0" anchor="ctr"/>
+          <a:lstStyle/>
+          <a:p>
+            <a:pPr algn="ctr"/>
+          </a:p>
+        </p:txBody>
+      </p:sp>
+      <p:sp>
+        <p:nvSpPr>
+          <p:cNvPr id="21" name="TextBox 20"/>
+          <p:cNvSpPr txBox="1"/>
+          <p:nvPr/>
+        </p:nvSpPr>
+        <p:spPr>
+          <a:xfrm>
+            <a:off x="4069080" y="2404872"/>
+            <a:ext cx="2103120" cy="237744"/>
+          </a:xfrm>
+          <a:prstGeom prst="rect">
+            <a:avLst/>
+          </a:prstGeom>
+          <a:noFill/>
+        </p:spPr>
+        <p:txBody>
+          <a:bodyPr wrap="square">
+            <a:spAutoFit/>
+          </a:bodyPr>
+          <a:lstStyle/>
+          <a:p>
+            <a:pPr algn="l"/>
+            <a:r>
+              <a:rPr sz="850" b="0" i="0">
+                <a:solidFill>
+                  <a:srgbClr val="262626"/>
+                </a:solidFill>
+                <a:latin typeface="Calibri"/>
+              </a:rPr>
+              <a:t>South India</a:t>
+            </a:r>
+          </a:p>
+        </p:txBody>
+      </p:sp>
+      <p:sp>
+        <p:nvSpPr>
+          <p:cNvPr id="22" name="Rectangle 21"/>
+          <p:cNvSpPr/>
+          <p:nvPr/>
+        </p:nvSpPr>
+        <p:spPr>
+          <a:xfrm>
+            <a:off x="6309360" y="2359152"/>
+            <a:ext cx="3664915" cy="329184"/>
+          </a:xfrm>
+          <a:prstGeom prst="rect">
+            <a:avLst/>
+          </a:prstGeom>
+          <a:solidFill>
+            <a:srgbClr val="FFC000"/>
+          </a:solidFill>
+          <a:ln>
+            <a:noFill/>
+          </a:ln>
+        </p:spPr>
+        <p:style>
+          <a:lnRef idx="1">
+            <a:schemeClr val="accent1"/>
+          </a:lnRef>
+          <a:fillRef idx="3">
+            <a:schemeClr val="accent1"/>
+          </a:fillRef>
+          <a:effectRef idx="2">
+            <a:schemeClr val="accent1"/>
+          </a:effectRef>
+          <a:fontRef idx="minor">
+            <a:schemeClr val="lt1"/>
+          </a:fontRef>
+        </p:style>
+        <p:txBody>
+          <a:bodyPr rtlCol="0" anchor="ctr"/>
+          <a:lstStyle/>
+          <a:p>
+            <a:pPr algn="ctr"/>
+          </a:p>
+        </p:txBody>
+      </p:sp>
+      <p:sp>
+        <p:nvSpPr>
+          <p:cNvPr id="23" name="TextBox 22"/>
+          <p:cNvSpPr txBox="1"/>
+          <p:nvPr/>
+        </p:nvSpPr>
+        <p:spPr>
+          <a:xfrm>
+            <a:off x="10019995" y="2404872"/>
+            <a:ext cx="731520" cy="237744"/>
+          </a:xfrm>
+          <a:prstGeom prst="rect">
+            <a:avLst/>
+          </a:prstGeom>
+          <a:noFill/>
+        </p:spPr>
+        <p:txBody>
+          <a:bodyPr wrap="square">
+            <a:spAutoFit/>
+          </a:bodyPr>
+          <a:lstStyle/>
+          <a:p>
+            <a:pPr algn="l"/>
+            <a:r>
+              <a:rPr sz="850" b="1" i="0">
+                <a:solidFill>
+                  <a:srgbClr val="1F3864"/>
+                </a:solidFill>
+                <a:latin typeface="Calibri"/>
+              </a:rPr>
+              <a:t>83.5%</a:t>
+            </a:r>
+          </a:p>
+        </p:txBody>
+      </p:sp>
+      <p:sp>
+        <p:nvSpPr>
+          <p:cNvPr id="24" name="Rectangle 23"/>
+          <p:cNvSpPr/>
+          <p:nvPr/>
+        </p:nvSpPr>
+        <p:spPr>
+          <a:xfrm>
+            <a:off x="4023360" y="2761488"/>
+            <a:ext cx="2194560" cy="329184"/>
+          </a:xfrm>
+          <a:prstGeom prst="rect">
+            <a:avLst/>
+          </a:prstGeom>
+          <a:solidFill>
+            <a:srgbClr val="F2F2F2"/>
+          </a:solidFill>
+          <a:ln>
+            <a:noFill/>
+          </a:ln>
+        </p:spPr>
+        <p:style>
+          <a:lnRef idx="1">
+            <a:schemeClr val="accent1"/>
+          </a:lnRef>
+          <a:fillRef idx="3">
+            <a:schemeClr val="accent1"/>
+          </a:fillRef>
+          <a:effectRef idx="2">
+            <a:schemeClr val="accent1"/>
+          </a:effectRef>
+          <a:fontRef idx="minor">
+            <a:schemeClr val="lt1"/>
+          </a:fontRef>
+        </p:style>
+        <p:txBody>
+          <a:bodyPr rtlCol="0" anchor="ctr"/>
+          <a:lstStyle/>
+          <a:p>
+            <a:pPr algn="ctr"/>
+          </a:p>
+        </p:txBody>
+      </p:sp>
+      <p:sp>
+        <p:nvSpPr>
+          <p:cNvPr id="25" name="TextBox 24"/>
+          <p:cNvSpPr txBox="1"/>
+          <p:nvPr/>
+        </p:nvSpPr>
+        <p:spPr>
+          <a:xfrm>
+            <a:off x="4069080" y="2807208"/>
+            <a:ext cx="2103120" cy="237744"/>
+          </a:xfrm>
+          <a:prstGeom prst="rect">
+            <a:avLst/>
+          </a:prstGeom>
+          <a:noFill/>
+        </p:spPr>
+        <p:txBody>
+          <a:bodyPr wrap="square">
+            <a:spAutoFit/>
+          </a:bodyPr>
+          <a:lstStyle/>
+          <a:p>
+            <a:pPr algn="l"/>
+            <a:r>
+              <a:rPr sz="850" b="0" i="0">
+                <a:solidFill>
+                  <a:srgbClr val="262626"/>
+                </a:solidFill>
+                <a:latin typeface="Calibri"/>
+              </a:rPr>
+              <a:t>Central India</a:t>
+            </a:r>
+          </a:p>
+        </p:txBody>
+      </p:sp>
+      <p:sp>
+        <p:nvSpPr>
+          <p:cNvPr id="26" name="Rectangle 25"/>
+          <p:cNvSpPr/>
+          <p:nvPr/>
+        </p:nvSpPr>
+        <p:spPr>
+          <a:xfrm>
+            <a:off x="6309360" y="2761488"/>
+            <a:ext cx="3621023" cy="329184"/>
+          </a:xfrm>
+          <a:prstGeom prst="rect">
+            <a:avLst/>
+          </a:prstGeom>
+          <a:solidFill>
+            <a:srgbClr val="FFC000"/>
+          </a:solidFill>
+          <a:ln>
+            <a:noFill/>
+          </a:ln>
+        </p:spPr>
+        <p:style>
+          <a:lnRef idx="1">
+            <a:schemeClr val="accent1"/>
+          </a:lnRef>
+          <a:fillRef idx="3">
+            <a:schemeClr val="accent1"/>
+          </a:fillRef>
+          <a:effectRef idx="2">
+            <a:schemeClr val="accent1"/>
+          </a:effectRef>
+          <a:fontRef idx="minor">
+            <a:schemeClr val="lt1"/>
+          </a:fontRef>
+        </p:style>
+        <p:txBody>
+          <a:bodyPr rtlCol="0" anchor="ctr"/>
+          <a:lstStyle/>
+          <a:p>
+            <a:pPr algn="ctr"/>
+          </a:p>
+        </p:txBody>
+      </p:sp>
+      <p:sp>
+        <p:nvSpPr>
+          <p:cNvPr id="27" name="TextBox 26"/>
+          <p:cNvSpPr txBox="1"/>
+          <p:nvPr/>
+        </p:nvSpPr>
+        <p:spPr>
+          <a:xfrm>
+            <a:off x="9976104" y="2807208"/>
+            <a:ext cx="731520" cy="237744"/>
+          </a:xfrm>
+          <a:prstGeom prst="rect">
+            <a:avLst/>
+          </a:prstGeom>
+          <a:noFill/>
+        </p:spPr>
+        <p:txBody>
+          <a:bodyPr wrap="square">
+            <a:spAutoFit/>
+          </a:bodyPr>
+          <a:lstStyle/>
+          <a:p>
+            <a:pPr algn="l"/>
+            <a:r>
+              <a:rPr sz="850" b="1" i="0">
+                <a:solidFill>
+                  <a:srgbClr val="1F3864"/>
+                </a:solidFill>
+                <a:latin typeface="Calibri"/>
+              </a:rPr>
+              <a:t>82.5%</a:t>
+            </a:r>
+          </a:p>
+        </p:txBody>
+      </p:sp>
+      <p:sp>
+        <p:nvSpPr>
+          <p:cNvPr id="28" name="Rectangle 27"/>
+          <p:cNvSpPr/>
+          <p:nvPr/>
+        </p:nvSpPr>
+        <p:spPr>
+          <a:xfrm>
+            <a:off x="4023360" y="3163824"/>
+            <a:ext cx="2194560" cy="329184"/>
+          </a:xfrm>
+          <a:prstGeom prst="rect">
+            <a:avLst/>
+          </a:prstGeom>
+          <a:solidFill>
+            <a:srgbClr val="F2F2F2"/>
+          </a:solidFill>
+          <a:ln>
+            <a:noFill/>
+          </a:ln>
+        </p:spPr>
+        <p:style>
+          <a:lnRef idx="1">
+            <a:schemeClr val="accent1"/>
+          </a:lnRef>
+          <a:fillRef idx="3">
+            <a:schemeClr val="accent1"/>
+          </a:fillRef>
+          <a:effectRef idx="2">
+            <a:schemeClr val="accent1"/>
+          </a:effectRef>
+          <a:fontRef idx="minor">
+            <a:schemeClr val="lt1"/>
+          </a:fontRef>
+        </p:style>
+        <p:txBody>
+          <a:bodyPr rtlCol="0" anchor="ctr"/>
+          <a:lstStyle/>
+          <a:p>
+            <a:pPr algn="ctr"/>
+          </a:p>
+        </p:txBody>
+      </p:sp>
+      <p:sp>
+        <p:nvSpPr>
+          <p:cNvPr id="29" name="TextBox 28"/>
+          <p:cNvSpPr txBox="1"/>
+          <p:nvPr/>
+        </p:nvSpPr>
+        <p:spPr>
+          <a:xfrm>
+            <a:off x="4069080" y="3209544"/>
+            <a:ext cx="2103120" cy="237744"/>
+          </a:xfrm>
+          <a:prstGeom prst="rect">
+            <a:avLst/>
+          </a:prstGeom>
+          <a:noFill/>
+        </p:spPr>
+        <p:txBody>
+          <a:bodyPr wrap="square">
+            <a:spAutoFit/>
+          </a:bodyPr>
+          <a:lstStyle/>
+          <a:p>
+            <a:pPr algn="l"/>
+            <a:r>
+              <a:rPr sz="850" b="0" i="0">
+                <a:solidFill>
+                  <a:srgbClr val="262626"/>
+                </a:solidFill>
+                <a:latin typeface="Calibri"/>
+              </a:rPr>
               <a:t>East India</a:t>
             </a:r>
           </a:p>
@@ -21035,14 +21694,692 @@
       </p:sp>
       <p:sp>
         <p:nvSpPr>
-          <p:cNvPr id="13" name="Rectangle 12"/>
+          <p:cNvPr id="30" name="Rectangle 29"/>
           <p:cNvSpPr/>
           <p:nvPr/>
         </p:nvSpPr>
         <p:spPr>
           <a:xfrm>
-            <a:off x="6492240" y="1627632"/>
-            <a:ext cx="137891" cy="347472"/>
+            <a:off x="6309360" y="3163824"/>
+            <a:ext cx="3621023" cy="329184"/>
+          </a:xfrm>
+          <a:prstGeom prst="rect">
+            <a:avLst/>
+          </a:prstGeom>
+          <a:solidFill>
+            <a:srgbClr val="FFC000"/>
+          </a:solidFill>
+          <a:ln>
+            <a:noFill/>
+          </a:ln>
+        </p:spPr>
+        <p:style>
+          <a:lnRef idx="1">
+            <a:schemeClr val="accent1"/>
+          </a:lnRef>
+          <a:fillRef idx="3">
+            <a:schemeClr val="accent1"/>
+          </a:fillRef>
+          <a:effectRef idx="2">
+            <a:schemeClr val="accent1"/>
+          </a:effectRef>
+          <a:fontRef idx="minor">
+            <a:schemeClr val="lt1"/>
+          </a:fontRef>
+        </p:style>
+        <p:txBody>
+          <a:bodyPr rtlCol="0" anchor="ctr"/>
+          <a:lstStyle/>
+          <a:p>
+            <a:pPr algn="ctr"/>
+          </a:p>
+        </p:txBody>
+      </p:sp>
+      <p:sp>
+        <p:nvSpPr>
+          <p:cNvPr id="31" name="TextBox 30"/>
+          <p:cNvSpPr txBox="1"/>
+          <p:nvPr/>
+        </p:nvSpPr>
+        <p:spPr>
+          <a:xfrm>
+            <a:off x="9976104" y="3209544"/>
+            <a:ext cx="731520" cy="237744"/>
+          </a:xfrm>
+          <a:prstGeom prst="rect">
+            <a:avLst/>
+          </a:prstGeom>
+          <a:noFill/>
+        </p:spPr>
+        <p:txBody>
+          <a:bodyPr wrap="square">
+            <a:spAutoFit/>
+          </a:bodyPr>
+          <a:lstStyle/>
+          <a:p>
+            <a:pPr algn="l"/>
+            <a:r>
+              <a:rPr sz="850" b="1" i="0">
+                <a:solidFill>
+                  <a:srgbClr val="1F3864"/>
+                </a:solidFill>
+                <a:latin typeface="Calibri"/>
+              </a:rPr>
+              <a:t>82.5%</a:t>
+            </a:r>
+          </a:p>
+        </p:txBody>
+      </p:sp>
+      <p:sp>
+        <p:nvSpPr>
+          <p:cNvPr id="32" name="TextBox 31"/>
+          <p:cNvSpPr txBox="1"/>
+          <p:nvPr/>
+        </p:nvSpPr>
+        <p:spPr>
+          <a:xfrm>
+            <a:off x="457200" y="3840480"/>
+            <a:ext cx="5212080" cy="256032"/>
+          </a:xfrm>
+          <a:prstGeom prst="rect">
+            <a:avLst/>
+          </a:prstGeom>
+          <a:noFill/>
+        </p:spPr>
+        <p:txBody>
+          <a:bodyPr wrap="square">
+            <a:spAutoFit/>
+          </a:bodyPr>
+          <a:lstStyle/>
+          <a:p>
+            <a:pPr algn="l"/>
+            <a:r>
+              <a:rPr sz="1100" b="1" i="0">
+                <a:solidFill>
+                  <a:srgbClr val="1F3864"/>
+                </a:solidFill>
+                <a:latin typeface="Calibri"/>
+              </a:rPr>
+              <a:t>OTIF by Distribution Channel</a:t>
+            </a:r>
+          </a:p>
+        </p:txBody>
+      </p:sp>
+      <p:sp>
+        <p:nvSpPr>
+          <p:cNvPr id="33" name="Rectangle 32"/>
+          <p:cNvSpPr/>
+          <p:nvPr/>
+        </p:nvSpPr>
+        <p:spPr>
+          <a:xfrm>
+            <a:off x="457200" y="4206240"/>
+            <a:ext cx="2514600" cy="868680"/>
+          </a:xfrm>
+          <a:prstGeom prst="rect">
+            <a:avLst/>
+          </a:prstGeom>
+          <a:solidFill>
+            <a:srgbClr val="FFC000"/>
+          </a:solidFill>
+          <a:ln>
+            <a:noFill/>
+          </a:ln>
+        </p:spPr>
+        <p:style>
+          <a:lnRef idx="1">
+            <a:schemeClr val="accent1"/>
+          </a:lnRef>
+          <a:fillRef idx="3">
+            <a:schemeClr val="accent1"/>
+          </a:fillRef>
+          <a:effectRef idx="2">
+            <a:schemeClr val="accent1"/>
+          </a:effectRef>
+          <a:fontRef idx="minor">
+            <a:schemeClr val="lt1"/>
+          </a:fontRef>
+        </p:style>
+        <p:txBody>
+          <a:bodyPr rtlCol="0" anchor="ctr"/>
+          <a:lstStyle/>
+          <a:p>
+            <a:pPr algn="ctr"/>
+          </a:p>
+        </p:txBody>
+      </p:sp>
+      <p:sp>
+        <p:nvSpPr>
+          <p:cNvPr id="34" name="TextBox 33"/>
+          <p:cNvSpPr txBox="1"/>
+          <p:nvPr/>
+        </p:nvSpPr>
+        <p:spPr>
+          <a:xfrm>
+            <a:off x="530352" y="4279392"/>
+            <a:ext cx="2331720" cy="292608"/>
+          </a:xfrm>
+          <a:prstGeom prst="rect">
+            <a:avLst/>
+          </a:prstGeom>
+          <a:noFill/>
+        </p:spPr>
+        <p:txBody>
+          <a:bodyPr wrap="square">
+            <a:spAutoFit/>
+          </a:bodyPr>
+          <a:lstStyle/>
+          <a:p>
+            <a:pPr algn="ctr"/>
+            <a:r>
+              <a:rPr sz="850" b="1" i="0">
+                <a:solidFill>
+                  <a:srgbClr val="FFFFFF"/>
+                </a:solidFill>
+                <a:latin typeface="Calibri"/>
+              </a:rPr>
+              <a:t>E-Commerce</a:t>
+            </a:r>
+          </a:p>
+        </p:txBody>
+      </p:sp>
+      <p:sp>
+        <p:nvSpPr>
+          <p:cNvPr id="35" name="TextBox 34"/>
+          <p:cNvSpPr txBox="1"/>
+          <p:nvPr/>
+        </p:nvSpPr>
+        <p:spPr>
+          <a:xfrm>
+            <a:off x="530352" y="4590288"/>
+            <a:ext cx="2331720" cy="438912"/>
+          </a:xfrm>
+          <a:prstGeom prst="rect">
+            <a:avLst/>
+          </a:prstGeom>
+          <a:noFill/>
+        </p:spPr>
+        <p:txBody>
+          <a:bodyPr wrap="square">
+            <a:spAutoFit/>
+          </a:bodyPr>
+          <a:lstStyle/>
+          <a:p>
+            <a:pPr algn="ctr"/>
+            <a:r>
+              <a:rPr sz="2000" b="1" i="0">
+                <a:solidFill>
+                  <a:srgbClr val="FFFFFF"/>
+                </a:solidFill>
+                <a:latin typeface="Calibri"/>
+              </a:rPr>
+              <a:t>82.2%</a:t>
+            </a:r>
+          </a:p>
+        </p:txBody>
+      </p:sp>
+      <p:sp>
+        <p:nvSpPr>
+          <p:cNvPr id="36" name="Rectangle 35"/>
+          <p:cNvSpPr/>
+          <p:nvPr/>
+        </p:nvSpPr>
+        <p:spPr>
+          <a:xfrm>
+            <a:off x="3108960" y="4206240"/>
+            <a:ext cx="2514600" cy="868680"/>
+          </a:xfrm>
+          <a:prstGeom prst="rect">
+            <a:avLst/>
+          </a:prstGeom>
+          <a:solidFill>
+            <a:srgbClr val="FFC000"/>
+          </a:solidFill>
+          <a:ln>
+            <a:noFill/>
+          </a:ln>
+        </p:spPr>
+        <p:style>
+          <a:lnRef idx="1">
+            <a:schemeClr val="accent1"/>
+          </a:lnRef>
+          <a:fillRef idx="3">
+            <a:schemeClr val="accent1"/>
+          </a:fillRef>
+          <a:effectRef idx="2">
+            <a:schemeClr val="accent1"/>
+          </a:effectRef>
+          <a:fontRef idx="minor">
+            <a:schemeClr val="lt1"/>
+          </a:fontRef>
+        </p:style>
+        <p:txBody>
+          <a:bodyPr rtlCol="0" anchor="ctr"/>
+          <a:lstStyle/>
+          <a:p>
+            <a:pPr algn="ctr"/>
+          </a:p>
+        </p:txBody>
+      </p:sp>
+      <p:sp>
+        <p:nvSpPr>
+          <p:cNvPr id="37" name="TextBox 36"/>
+          <p:cNvSpPr txBox="1"/>
+          <p:nvPr/>
+        </p:nvSpPr>
+        <p:spPr>
+          <a:xfrm>
+            <a:off x="3182112" y="4279392"/>
+            <a:ext cx="2331720" cy="292608"/>
+          </a:xfrm>
+          <a:prstGeom prst="rect">
+            <a:avLst/>
+          </a:prstGeom>
+          <a:noFill/>
+        </p:spPr>
+        <p:txBody>
+          <a:bodyPr wrap="square">
+            <a:spAutoFit/>
+          </a:bodyPr>
+          <a:lstStyle/>
+          <a:p>
+            <a:pPr algn="ctr"/>
+            <a:r>
+              <a:rPr sz="850" b="1" i="0">
+                <a:solidFill>
+                  <a:srgbClr val="FFFFFF"/>
+                </a:solidFill>
+                <a:latin typeface="Calibri"/>
+              </a:rPr>
+              <a:t>General Trade</a:t>
+            </a:r>
+          </a:p>
+        </p:txBody>
+      </p:sp>
+      <p:sp>
+        <p:nvSpPr>
+          <p:cNvPr id="38" name="TextBox 37"/>
+          <p:cNvSpPr txBox="1"/>
+          <p:nvPr/>
+        </p:nvSpPr>
+        <p:spPr>
+          <a:xfrm>
+            <a:off x="3182112" y="4590288"/>
+            <a:ext cx="2331720" cy="438912"/>
+          </a:xfrm>
+          <a:prstGeom prst="rect">
+            <a:avLst/>
+          </a:prstGeom>
+          <a:noFill/>
+        </p:spPr>
+        <p:txBody>
+          <a:bodyPr wrap="square">
+            <a:spAutoFit/>
+          </a:bodyPr>
+          <a:lstStyle/>
+          <a:p>
+            <a:pPr algn="ctr"/>
+            <a:r>
+              <a:rPr sz="2000" b="1" i="0">
+                <a:solidFill>
+                  <a:srgbClr val="FFFFFF"/>
+                </a:solidFill>
+                <a:latin typeface="Calibri"/>
+              </a:rPr>
+              <a:t>83.2%</a:t>
+            </a:r>
+          </a:p>
+        </p:txBody>
+      </p:sp>
+      <p:sp>
+        <p:nvSpPr>
+          <p:cNvPr id="39" name="Rectangle 38"/>
+          <p:cNvSpPr/>
+          <p:nvPr/>
+        </p:nvSpPr>
+        <p:spPr>
+          <a:xfrm>
+            <a:off x="457200" y="5257800"/>
+            <a:ext cx="2514600" cy="868680"/>
+          </a:xfrm>
+          <a:prstGeom prst="rect">
+            <a:avLst/>
+          </a:prstGeom>
+          <a:solidFill>
+            <a:srgbClr val="375623"/>
+          </a:solidFill>
+          <a:ln>
+            <a:noFill/>
+          </a:ln>
+        </p:spPr>
+        <p:style>
+          <a:lnRef idx="1">
+            <a:schemeClr val="accent1"/>
+          </a:lnRef>
+          <a:fillRef idx="3">
+            <a:schemeClr val="accent1"/>
+          </a:fillRef>
+          <a:effectRef idx="2">
+            <a:schemeClr val="accent1"/>
+          </a:effectRef>
+          <a:fontRef idx="minor">
+            <a:schemeClr val="lt1"/>
+          </a:fontRef>
+        </p:style>
+        <p:txBody>
+          <a:bodyPr rtlCol="0" anchor="ctr"/>
+          <a:lstStyle/>
+          <a:p>
+            <a:pPr algn="ctr"/>
+          </a:p>
+        </p:txBody>
+      </p:sp>
+      <p:sp>
+        <p:nvSpPr>
+          <p:cNvPr id="40" name="TextBox 39"/>
+          <p:cNvSpPr txBox="1"/>
+          <p:nvPr/>
+        </p:nvSpPr>
+        <p:spPr>
+          <a:xfrm>
+            <a:off x="530352" y="5330952"/>
+            <a:ext cx="2331720" cy="292608"/>
+          </a:xfrm>
+          <a:prstGeom prst="rect">
+            <a:avLst/>
+          </a:prstGeom>
+          <a:noFill/>
+        </p:spPr>
+        <p:txBody>
+          <a:bodyPr wrap="square">
+            <a:spAutoFit/>
+          </a:bodyPr>
+          <a:lstStyle/>
+          <a:p>
+            <a:pPr algn="ctr"/>
+            <a:r>
+              <a:rPr sz="850" b="1" i="0">
+                <a:solidFill>
+                  <a:srgbClr val="FFFFFF"/>
+                </a:solidFill>
+                <a:latin typeface="Calibri"/>
+              </a:rPr>
+              <a:t>Modern Trade</a:t>
+            </a:r>
+          </a:p>
+        </p:txBody>
+      </p:sp>
+      <p:sp>
+        <p:nvSpPr>
+          <p:cNvPr id="41" name="TextBox 40"/>
+          <p:cNvSpPr txBox="1"/>
+          <p:nvPr/>
+        </p:nvSpPr>
+        <p:spPr>
+          <a:xfrm>
+            <a:off x="530352" y="5641848"/>
+            <a:ext cx="2331720" cy="438912"/>
+          </a:xfrm>
+          <a:prstGeom prst="rect">
+            <a:avLst/>
+          </a:prstGeom>
+          <a:noFill/>
+        </p:spPr>
+        <p:txBody>
+          <a:bodyPr wrap="square">
+            <a:spAutoFit/>
+          </a:bodyPr>
+          <a:lstStyle/>
+          <a:p>
+            <a:pPr algn="ctr"/>
+            <a:r>
+              <a:rPr sz="2000" b="1" i="0">
+                <a:solidFill>
+                  <a:srgbClr val="FFFFFF"/>
+                </a:solidFill>
+                <a:latin typeface="Calibri"/>
+              </a:rPr>
+              <a:t>85.7%</a:t>
+            </a:r>
+          </a:p>
+        </p:txBody>
+      </p:sp>
+      <p:sp>
+        <p:nvSpPr>
+          <p:cNvPr id="42" name="Rectangle 41"/>
+          <p:cNvSpPr/>
+          <p:nvPr/>
+        </p:nvSpPr>
+        <p:spPr>
+          <a:xfrm>
+            <a:off x="3108960" y="5257800"/>
+            <a:ext cx="2514600" cy="868680"/>
+          </a:xfrm>
+          <a:prstGeom prst="rect">
+            <a:avLst/>
+          </a:prstGeom>
+          <a:solidFill>
+            <a:srgbClr val="FFC000"/>
+          </a:solidFill>
+          <a:ln>
+            <a:noFill/>
+          </a:ln>
+        </p:spPr>
+        <p:style>
+          <a:lnRef idx="1">
+            <a:schemeClr val="accent1"/>
+          </a:lnRef>
+          <a:fillRef idx="3">
+            <a:schemeClr val="accent1"/>
+          </a:fillRef>
+          <a:effectRef idx="2">
+            <a:schemeClr val="accent1"/>
+          </a:effectRef>
+          <a:fontRef idx="minor">
+            <a:schemeClr val="lt1"/>
+          </a:fontRef>
+        </p:style>
+        <p:txBody>
+          <a:bodyPr rtlCol="0" anchor="ctr"/>
+          <a:lstStyle/>
+          <a:p>
+            <a:pPr algn="ctr"/>
+          </a:p>
+        </p:txBody>
+      </p:sp>
+      <p:sp>
+        <p:nvSpPr>
+          <p:cNvPr id="43" name="TextBox 42"/>
+          <p:cNvSpPr txBox="1"/>
+          <p:nvPr/>
+        </p:nvSpPr>
+        <p:spPr>
+          <a:xfrm>
+            <a:off x="3182112" y="5330952"/>
+            <a:ext cx="2331720" cy="292608"/>
+          </a:xfrm>
+          <a:prstGeom prst="rect">
+            <a:avLst/>
+          </a:prstGeom>
+          <a:noFill/>
+        </p:spPr>
+        <p:txBody>
+          <a:bodyPr wrap="square">
+            <a:spAutoFit/>
+          </a:bodyPr>
+          <a:lstStyle/>
+          <a:p>
+            <a:pPr algn="ctr"/>
+            <a:r>
+              <a:rPr sz="850" b="1" i="0">
+                <a:solidFill>
+                  <a:srgbClr val="FFFFFF"/>
+                </a:solidFill>
+                <a:latin typeface="Calibri"/>
+              </a:rPr>
+              <a:t>On-Premise</a:t>
+            </a:r>
+          </a:p>
+        </p:txBody>
+      </p:sp>
+      <p:sp>
+        <p:nvSpPr>
+          <p:cNvPr id="44" name="TextBox 43"/>
+          <p:cNvSpPr txBox="1"/>
+          <p:nvPr/>
+        </p:nvSpPr>
+        <p:spPr>
+          <a:xfrm>
+            <a:off x="3182112" y="5641848"/>
+            <a:ext cx="2331720" cy="438912"/>
+          </a:xfrm>
+          <a:prstGeom prst="rect">
+            <a:avLst/>
+          </a:prstGeom>
+          <a:noFill/>
+        </p:spPr>
+        <p:txBody>
+          <a:bodyPr wrap="square">
+            <a:spAutoFit/>
+          </a:bodyPr>
+          <a:lstStyle/>
+          <a:p>
+            <a:pPr algn="ctr"/>
+            <a:r>
+              <a:rPr sz="2000" b="1" i="0">
+                <a:solidFill>
+                  <a:srgbClr val="FFFFFF"/>
+                </a:solidFill>
+                <a:latin typeface="Calibri"/>
+              </a:rPr>
+              <a:t>82.6%</a:t>
+            </a:r>
+          </a:p>
+        </p:txBody>
+      </p:sp>
+      <p:sp>
+        <p:nvSpPr>
+          <p:cNvPr id="45" name="TextBox 44"/>
+          <p:cNvSpPr txBox="1"/>
+          <p:nvPr/>
+        </p:nvSpPr>
+        <p:spPr>
+          <a:xfrm>
+            <a:off x="6035040" y="3840480"/>
+            <a:ext cx="5669280" cy="256032"/>
+          </a:xfrm>
+          <a:prstGeom prst="rect">
+            <a:avLst/>
+          </a:prstGeom>
+          <a:noFill/>
+        </p:spPr>
+        <p:txBody>
+          <a:bodyPr wrap="square">
+            <a:spAutoFit/>
+          </a:bodyPr>
+          <a:lstStyle/>
+          <a:p>
+            <a:pPr algn="l"/>
+            <a:r>
+              <a:rPr sz="1100" b="1" i="0">
+                <a:solidFill>
+                  <a:srgbClr val="1F3864"/>
+                </a:solidFill>
+                <a:latin typeface="Calibri"/>
+              </a:rPr>
+              <a:t>Root Causes of OTIF Failures (% of Non-Compliant Orders)</a:t>
+            </a:r>
+          </a:p>
+        </p:txBody>
+      </p:sp>
+      <p:sp>
+        <p:nvSpPr>
+          <p:cNvPr id="46" name="Rectangle 45"/>
+          <p:cNvSpPr/>
+          <p:nvPr/>
+        </p:nvSpPr>
+        <p:spPr>
+          <a:xfrm>
+            <a:off x="6035040" y="4206240"/>
+            <a:ext cx="2468880" cy="329184"/>
+          </a:xfrm>
+          <a:prstGeom prst="rect">
+            <a:avLst/>
+          </a:prstGeom>
+          <a:solidFill>
+            <a:srgbClr val="F2F2F2"/>
+          </a:solidFill>
+          <a:ln>
+            <a:noFill/>
+          </a:ln>
+        </p:spPr>
+        <p:style>
+          <a:lnRef idx="1">
+            <a:schemeClr val="accent1"/>
+          </a:lnRef>
+          <a:fillRef idx="3">
+            <a:schemeClr val="accent1"/>
+          </a:fillRef>
+          <a:effectRef idx="2">
+            <a:schemeClr val="accent1"/>
+          </a:effectRef>
+          <a:fontRef idx="minor">
+            <a:schemeClr val="lt1"/>
+          </a:fontRef>
+        </p:style>
+        <p:txBody>
+          <a:bodyPr rtlCol="0" anchor="ctr"/>
+          <a:lstStyle/>
+          <a:p>
+            <a:pPr algn="ctr"/>
+          </a:p>
+        </p:txBody>
+      </p:sp>
+      <p:sp>
+        <p:nvSpPr>
+          <p:cNvPr id="47" name="TextBox 46"/>
+          <p:cNvSpPr txBox="1"/>
+          <p:nvPr/>
+        </p:nvSpPr>
+        <p:spPr>
+          <a:xfrm>
+            <a:off x="6080760" y="4251959"/>
+            <a:ext cx="2377440" cy="237744"/>
+          </a:xfrm>
+          <a:prstGeom prst="rect">
+            <a:avLst/>
+          </a:prstGeom>
+          <a:noFill/>
+        </p:spPr>
+        <p:txBody>
+          <a:bodyPr wrap="square">
+            <a:spAutoFit/>
+          </a:bodyPr>
+          <a:lstStyle/>
+          <a:p>
+            <a:pPr algn="l"/>
+            <a:r>
+              <a:rPr sz="800" b="0" i="0">
+                <a:solidFill>
+                  <a:srgbClr val="262626"/>
+                </a:solidFill>
+                <a:latin typeface="Calibri"/>
+              </a:rPr>
+              <a:t>Supplier Component Delays</a:t>
+            </a:r>
+          </a:p>
+        </p:txBody>
+      </p:sp>
+      <p:sp>
+        <p:nvSpPr>
+          <p:cNvPr id="48" name="Rectangle 47"/>
+          <p:cNvSpPr/>
+          <p:nvPr/>
+        </p:nvSpPr>
+        <p:spPr>
+          <a:xfrm>
+            <a:off x="8595360" y="4206240"/>
+            <a:ext cx="2080260" cy="329184"/>
           </a:xfrm>
           <a:prstGeom prst="rect">
             <a:avLst/>
@@ -21078,14 +22415,14 @@
       </p:sp>
       <p:sp>
         <p:nvSpPr>
-          <p:cNvPr id="14" name="TextBox 13"/>
-          <p:cNvSpPr txBox="1"/>
-          <p:nvPr/>
-        </p:nvSpPr>
-        <p:spPr>
-          <a:xfrm>
-            <a:off x="6675851" y="1645919"/>
-            <a:ext cx="731520" cy="310896"/>
+          <p:cNvPr id="49" name="TextBox 48"/>
+          <p:cNvSpPr txBox="1"/>
+          <p:nvPr/>
+        </p:nvSpPr>
+        <p:spPr>
+          <a:xfrm>
+            <a:off x="10721340" y="4251959"/>
+            <a:ext cx="548640" cy="237744"/>
           </a:xfrm>
           <a:prstGeom prst="rect">
             <a:avLst/>
@@ -21100,27 +22437,27 @@
           <a:p>
             <a:pPr algn="l"/>
             <a:r>
-              <a:rPr sz="900" b="1" i="0">
+              <a:rPr sz="850" b="1" i="0">
                 <a:solidFill>
                   <a:srgbClr val="1F3864"/>
                 </a:solidFill>
                 <a:latin typeface="Calibri"/>
               </a:rPr>
-              <a:t>2.6%</a:t>
-            </a:r>
-          </a:p>
-        </p:txBody>
-      </p:sp>
-      <p:sp>
-        <p:nvSpPr>
-          <p:cNvPr id="15" name="Rectangle 14"/>
+              <a:t>35%</a:t>
+            </a:r>
+          </a:p>
+        </p:txBody>
+      </p:sp>
+      <p:sp>
+        <p:nvSpPr>
+          <p:cNvPr id="50" name="Rectangle 49"/>
           <p:cNvSpPr/>
           <p:nvPr/>
         </p:nvSpPr>
         <p:spPr>
           <a:xfrm>
-            <a:off x="3840480" y="2194560"/>
-            <a:ext cx="2560320" cy="530352"/>
+            <a:off x="6035040" y="4608576"/>
+            <a:ext cx="2468880" cy="329184"/>
           </a:xfrm>
           <a:prstGeom prst="rect">
             <a:avLst/>
@@ -21156,14 +22493,14 @@
       </p:sp>
       <p:sp>
         <p:nvSpPr>
-          <p:cNvPr id="16" name="TextBox 15"/>
-          <p:cNvSpPr txBox="1"/>
-          <p:nvPr/>
-        </p:nvSpPr>
-        <p:spPr>
-          <a:xfrm>
-            <a:off x="3886200" y="2286000"/>
-            <a:ext cx="2468880" cy="347472"/>
+          <p:cNvPr id="51" name="TextBox 50"/>
+          <p:cNvSpPr txBox="1"/>
+          <p:nvPr/>
+        </p:nvSpPr>
+        <p:spPr>
+          <a:xfrm>
+            <a:off x="6080760" y="4654296"/>
+            <a:ext cx="2377440" cy="237744"/>
           </a:xfrm>
           <a:prstGeom prst="rect">
             <a:avLst/>
@@ -21178,33 +22515,33 @@
           <a:p>
             <a:pPr algn="l"/>
             <a:r>
-              <a:rPr sz="900" b="0" i="0">
+              <a:rPr sz="800" b="0" i="0">
                 <a:solidFill>
                   <a:srgbClr val="262626"/>
                 </a:solidFill>
                 <a:latin typeface="Calibri"/>
               </a:rPr>
-              <a:t>Central India</a:t>
-            </a:r>
-          </a:p>
-        </p:txBody>
-      </p:sp>
-      <p:sp>
-        <p:nvSpPr>
-          <p:cNvPr id="17" name="Rectangle 16"/>
+              <a:t>Transit / Highway Congestion</a:t>
+            </a:r>
+          </a:p>
+        </p:txBody>
+      </p:sp>
+      <p:sp>
+        <p:nvSpPr>
+          <p:cNvPr id="52" name="Rectangle 51"/>
           <p:cNvSpPr/>
           <p:nvPr/>
         </p:nvSpPr>
         <p:spPr>
           <a:xfrm>
-            <a:off x="6492240" y="2286000"/>
-            <a:ext cx="381853" cy="347472"/>
+            <a:off x="8595360" y="4608576"/>
+            <a:ext cx="1664207" cy="329184"/>
           </a:xfrm>
           <a:prstGeom prst="rect">
             <a:avLst/>
           </a:prstGeom>
           <a:solidFill>
-            <a:srgbClr val="C00000"/>
+            <a:srgbClr val="FFC000"/>
           </a:solidFill>
           <a:ln>
             <a:noFill/>
@@ -21234,14 +22571,14 @@
       </p:sp>
       <p:sp>
         <p:nvSpPr>
-          <p:cNvPr id="18" name="TextBox 17"/>
-          <p:cNvSpPr txBox="1"/>
-          <p:nvPr/>
-        </p:nvSpPr>
-        <p:spPr>
-          <a:xfrm>
-            <a:off x="6919813" y="2304288"/>
-            <a:ext cx="731520" cy="310896"/>
+          <p:cNvPr id="53" name="TextBox 52"/>
+          <p:cNvSpPr txBox="1"/>
+          <p:nvPr/>
+        </p:nvSpPr>
+        <p:spPr>
+          <a:xfrm>
+            <a:off x="10305288" y="4654296"/>
+            <a:ext cx="548640" cy="237744"/>
           </a:xfrm>
           <a:prstGeom prst="rect">
             <a:avLst/>
@@ -21256,27 +22593,27 @@
           <a:p>
             <a:pPr algn="l"/>
             <a:r>
-              <a:rPr sz="900" b="1" i="0">
+              <a:rPr sz="850" b="1" i="0">
                 <a:solidFill>
                   <a:srgbClr val="1F3864"/>
                 </a:solidFill>
                 <a:latin typeface="Calibri"/>
               </a:rPr>
-              <a:t>7.2%</a:t>
-            </a:r>
-          </a:p>
-        </p:txBody>
-      </p:sp>
-      <p:sp>
-        <p:nvSpPr>
-          <p:cNvPr id="19" name="Rectangle 18"/>
+              <a:t>28%</a:t>
+            </a:r>
+          </a:p>
+        </p:txBody>
+      </p:sp>
+      <p:sp>
+        <p:nvSpPr>
+          <p:cNvPr id="54" name="Rectangle 53"/>
           <p:cNvSpPr/>
           <p:nvPr/>
         </p:nvSpPr>
         <p:spPr>
           <a:xfrm>
-            <a:off x="3840480" y="2852928"/>
-            <a:ext cx="2560320" cy="530352"/>
+            <a:off x="6035040" y="5010912"/>
+            <a:ext cx="2468880" cy="329184"/>
           </a:xfrm>
           <a:prstGeom prst="rect">
             <a:avLst/>
@@ -21312,14 +22649,14 @@
       </p:sp>
       <p:sp>
         <p:nvSpPr>
-          <p:cNvPr id="20" name="TextBox 19"/>
-          <p:cNvSpPr txBox="1"/>
-          <p:nvPr/>
-        </p:nvSpPr>
-        <p:spPr>
-          <a:xfrm>
-            <a:off x="3886200" y="2944368"/>
-            <a:ext cx="2468880" cy="347472"/>
+          <p:cNvPr id="55" name="TextBox 54"/>
+          <p:cNvSpPr txBox="1"/>
+          <p:nvPr/>
+        </p:nvSpPr>
+        <p:spPr>
+          <a:xfrm>
+            <a:off x="6080760" y="5056631"/>
+            <a:ext cx="2377440" cy="237744"/>
           </a:xfrm>
           <a:prstGeom prst="rect">
             <a:avLst/>
@@ -21334,33 +22671,33 @@
           <a:p>
             <a:pPr algn="l"/>
             <a:r>
-              <a:rPr sz="900" b="0" i="0">
+              <a:rPr sz="800" b="0" i="0">
                 <a:solidFill>
                   <a:srgbClr val="262626"/>
                 </a:solidFill>
                 <a:latin typeface="Calibri"/>
               </a:rPr>
-              <a:t>South India</a:t>
-            </a:r>
-          </a:p>
-        </p:txBody>
-      </p:sp>
-      <p:sp>
-        <p:nvSpPr>
-          <p:cNvPr id="21" name="Rectangle 20"/>
+              <a:t>Demand Forecast Error</a:t>
+            </a:r>
+          </a:p>
+        </p:txBody>
+      </p:sp>
+      <p:sp>
+        <p:nvSpPr>
+          <p:cNvPr id="56" name="Rectangle 55"/>
           <p:cNvSpPr/>
           <p:nvPr/>
         </p:nvSpPr>
         <p:spPr>
           <a:xfrm>
-            <a:off x="6492240" y="2944368"/>
-            <a:ext cx="450799" cy="347472"/>
+            <a:off x="8595360" y="5010912"/>
+            <a:ext cx="1069848" cy="329184"/>
           </a:xfrm>
           <a:prstGeom prst="rect">
             <a:avLst/>
           </a:prstGeom>
           <a:solidFill>
-            <a:srgbClr val="C00000"/>
+            <a:srgbClr val="FFC000"/>
           </a:solidFill>
           <a:ln>
             <a:noFill/>
@@ -21390,14 +22727,14 @@
       </p:sp>
       <p:sp>
         <p:nvSpPr>
-          <p:cNvPr id="22" name="TextBox 21"/>
-          <p:cNvSpPr txBox="1"/>
-          <p:nvPr/>
-        </p:nvSpPr>
-        <p:spPr>
-          <a:xfrm>
-            <a:off x="6988759" y="2962656"/>
-            <a:ext cx="731520" cy="310896"/>
+          <p:cNvPr id="57" name="TextBox 56"/>
+          <p:cNvSpPr txBox="1"/>
+          <p:nvPr/>
+        </p:nvSpPr>
+        <p:spPr>
+          <a:xfrm>
+            <a:off x="9710928" y="5056631"/>
+            <a:ext cx="548640" cy="237744"/>
           </a:xfrm>
           <a:prstGeom prst="rect">
             <a:avLst/>
@@ -21412,27 +22749,27 @@
           <a:p>
             <a:pPr algn="l"/>
             <a:r>
-              <a:rPr sz="900" b="1" i="0">
+              <a:rPr sz="850" b="1" i="0">
                 <a:solidFill>
                   <a:srgbClr val="1F3864"/>
                 </a:solidFill>
                 <a:latin typeface="Calibri"/>
               </a:rPr>
-              <a:t>8.5%</a:t>
-            </a:r>
-          </a:p>
-        </p:txBody>
-      </p:sp>
-      <p:sp>
-        <p:nvSpPr>
-          <p:cNvPr id="23" name="Rectangle 22"/>
+              <a:t>18%</a:t>
+            </a:r>
+          </a:p>
+        </p:txBody>
+      </p:sp>
+      <p:sp>
+        <p:nvSpPr>
+          <p:cNvPr id="58" name="Rectangle 57"/>
           <p:cNvSpPr/>
           <p:nvPr/>
         </p:nvSpPr>
         <p:spPr>
           <a:xfrm>
-            <a:off x="3840480" y="3511296"/>
-            <a:ext cx="2560320" cy="530352"/>
+            <a:off x="6035040" y="5413248"/>
+            <a:ext cx="2468880" cy="329184"/>
           </a:xfrm>
           <a:prstGeom prst="rect">
             <a:avLst/>
@@ -21468,14 +22805,14 @@
       </p:sp>
       <p:sp>
         <p:nvSpPr>
-          <p:cNvPr id="24" name="TextBox 23"/>
-          <p:cNvSpPr txBox="1"/>
-          <p:nvPr/>
-        </p:nvSpPr>
-        <p:spPr>
-          <a:xfrm>
-            <a:off x="3886200" y="3602736"/>
-            <a:ext cx="2468880" cy="347472"/>
+          <p:cNvPr id="59" name="TextBox 58"/>
+          <p:cNvSpPr txBox="1"/>
+          <p:nvPr/>
+        </p:nvSpPr>
+        <p:spPr>
+          <a:xfrm>
+            <a:off x="6080760" y="5458968"/>
+            <a:ext cx="2377440" cy="237744"/>
           </a:xfrm>
           <a:prstGeom prst="rect">
             <a:avLst/>
@@ -21490,33 +22827,33 @@
           <a:p>
             <a:pPr algn="l"/>
             <a:r>
-              <a:rPr sz="900" b="0" i="0">
+              <a:rPr sz="800" b="0" i="0">
                 <a:solidFill>
                   <a:srgbClr val="262626"/>
                 </a:solidFill>
                 <a:latin typeface="Calibri"/>
               </a:rPr>
-              <a:t>West India</a:t>
-            </a:r>
-          </a:p>
-        </p:txBody>
-      </p:sp>
-      <p:sp>
-        <p:nvSpPr>
-          <p:cNvPr id="25" name="Rectangle 24"/>
+              <a:t>Warehouse Processing Lag</a:t>
+            </a:r>
+          </a:p>
+        </p:txBody>
+      </p:sp>
+      <p:sp>
+        <p:nvSpPr>
+          <p:cNvPr id="60" name="Rectangle 59"/>
           <p:cNvSpPr/>
           <p:nvPr/>
         </p:nvSpPr>
         <p:spPr>
           <a:xfrm>
-            <a:off x="6492240" y="3602736"/>
-            <a:ext cx="1341790" cy="347472"/>
+            <a:off x="8595360" y="5413248"/>
+            <a:ext cx="713232" cy="329184"/>
           </a:xfrm>
           <a:prstGeom prst="rect">
             <a:avLst/>
           </a:prstGeom>
           <a:solidFill>
-            <a:srgbClr val="C00000"/>
+            <a:srgbClr val="2E75B6"/>
           </a:solidFill>
           <a:ln>
             <a:noFill/>
@@ -21546,14 +22883,14 @@
       </p:sp>
       <p:sp>
         <p:nvSpPr>
-          <p:cNvPr id="26" name="TextBox 25"/>
-          <p:cNvSpPr txBox="1"/>
-          <p:nvPr/>
-        </p:nvSpPr>
-        <p:spPr>
-          <a:xfrm>
-            <a:off x="7879750" y="3621024"/>
-            <a:ext cx="731520" cy="310896"/>
+          <p:cNvPr id="61" name="TextBox 60"/>
+          <p:cNvSpPr txBox="1"/>
+          <p:nvPr/>
+        </p:nvSpPr>
+        <p:spPr>
+          <a:xfrm>
+            <a:off x="9354311" y="5458968"/>
+            <a:ext cx="548640" cy="237744"/>
           </a:xfrm>
           <a:prstGeom prst="rect">
             <a:avLst/>
@@ -21568,27 +22905,27 @@
           <a:p>
             <a:pPr algn="l"/>
             <a:r>
-              <a:rPr sz="900" b="1" i="0">
+              <a:rPr sz="850" b="1" i="0">
                 <a:solidFill>
                   <a:srgbClr val="1F3864"/>
                 </a:solidFill>
                 <a:latin typeface="Calibri"/>
               </a:rPr>
-              <a:t>25.3%</a:t>
-            </a:r>
-          </a:p>
-        </p:txBody>
-      </p:sp>
-      <p:sp>
-        <p:nvSpPr>
-          <p:cNvPr id="27" name="Rectangle 26"/>
+              <a:t>12%</a:t>
+            </a:r>
+          </a:p>
+        </p:txBody>
+      </p:sp>
+      <p:sp>
+        <p:nvSpPr>
+          <p:cNvPr id="62" name="Rectangle 61"/>
           <p:cNvSpPr/>
           <p:nvPr/>
         </p:nvSpPr>
         <p:spPr>
           <a:xfrm>
-            <a:off x="3840480" y="4169663"/>
-            <a:ext cx="2560320" cy="530352"/>
+            <a:off x="6035040" y="5815583"/>
+            <a:ext cx="2468880" cy="329184"/>
           </a:xfrm>
           <a:prstGeom prst="rect">
             <a:avLst/>
@@ -21624,14 +22961,14 @@
       </p:sp>
       <p:sp>
         <p:nvSpPr>
-          <p:cNvPr id="28" name="TextBox 27"/>
-          <p:cNvSpPr txBox="1"/>
-          <p:nvPr/>
-        </p:nvSpPr>
-        <p:spPr>
-          <a:xfrm>
-            <a:off x="3886200" y="4261103"/>
-            <a:ext cx="2468880" cy="347472"/>
+          <p:cNvPr id="63" name="TextBox 62"/>
+          <p:cNvSpPr txBox="1"/>
+          <p:nvPr/>
+        </p:nvSpPr>
+        <p:spPr>
+          <a:xfrm>
+            <a:off x="6080760" y="5861303"/>
+            <a:ext cx="2377440" cy="237744"/>
           </a:xfrm>
           <a:prstGeom prst="rect">
             <a:avLst/>
@@ -21646,1173 +22983,27 @@
           <a:p>
             <a:pPr algn="l"/>
             <a:r>
-              <a:rPr sz="900" b="0" i="0">
+              <a:rPr sz="800" b="0" i="0">
                 <a:solidFill>
                   <a:srgbClr val="262626"/>
                 </a:solidFill>
                 <a:latin typeface="Calibri"/>
               </a:rPr>
-              <a:t>North India</a:t>
-            </a:r>
-          </a:p>
-        </p:txBody>
-      </p:sp>
-      <p:sp>
-        <p:nvSpPr>
-          <p:cNvPr id="29" name="Rectangle 28"/>
+              <a:t>Regulatory &amp; Excise Permits</a:t>
+            </a:r>
+          </a:p>
+        </p:txBody>
+      </p:sp>
+      <p:sp>
+        <p:nvSpPr>
+          <p:cNvPr id="64" name="Rectangle 63"/>
           <p:cNvSpPr/>
           <p:nvPr/>
         </p:nvSpPr>
         <p:spPr>
           <a:xfrm>
-            <a:off x="6492240" y="4261103"/>
-            <a:ext cx="1638787" cy="347472"/>
-          </a:xfrm>
-          <a:prstGeom prst="rect">
-            <a:avLst/>
-          </a:prstGeom>
-          <a:solidFill>
-            <a:srgbClr val="C00000"/>
-          </a:solidFill>
-          <a:ln>
-            <a:noFill/>
-          </a:ln>
-        </p:spPr>
-        <p:style>
-          <a:lnRef idx="1">
-            <a:schemeClr val="accent1"/>
-          </a:lnRef>
-          <a:fillRef idx="3">
-            <a:schemeClr val="accent1"/>
-          </a:fillRef>
-          <a:effectRef idx="2">
-            <a:schemeClr val="accent1"/>
-          </a:effectRef>
-          <a:fontRef idx="minor">
-            <a:schemeClr val="lt1"/>
-          </a:fontRef>
-        </p:style>
-        <p:txBody>
-          <a:bodyPr rtlCol="0" anchor="ctr"/>
-          <a:lstStyle/>
-          <a:p>
-            <a:pPr algn="ctr"/>
-          </a:p>
-        </p:txBody>
-      </p:sp>
-      <p:sp>
-        <p:nvSpPr>
-          <p:cNvPr id="30" name="TextBox 29"/>
-          <p:cNvSpPr txBox="1"/>
-          <p:nvPr/>
-        </p:nvSpPr>
-        <p:spPr>
-          <a:xfrm>
-            <a:off x="8176747" y="4279392"/>
-            <a:ext cx="731520" cy="310896"/>
-          </a:xfrm>
-          <a:prstGeom prst="rect">
-            <a:avLst/>
-          </a:prstGeom>
-          <a:noFill/>
-        </p:spPr>
-        <p:txBody>
-          <a:bodyPr wrap="square">
-            <a:spAutoFit/>
-          </a:bodyPr>
-          <a:lstStyle/>
-          <a:p>
-            <a:pPr algn="l"/>
-            <a:r>
-              <a:rPr sz="900" b="1" i="0">
-                <a:solidFill>
-                  <a:srgbClr val="1F3864"/>
-                </a:solidFill>
-                <a:latin typeface="Calibri"/>
-              </a:rPr>
-              <a:t>30.9%</a:t>
-            </a:r>
-          </a:p>
-        </p:txBody>
-      </p:sp>
-      <p:sp>
-        <p:nvSpPr>
-          <p:cNvPr id="31" name="TextBox 30"/>
-          <p:cNvSpPr txBox="1"/>
-          <p:nvPr/>
-        </p:nvSpPr>
-        <p:spPr>
-          <a:xfrm>
-            <a:off x="365760" y="3429000"/>
-            <a:ext cx="5303520" cy="256032"/>
-          </a:xfrm>
-          <a:prstGeom prst="rect">
-            <a:avLst/>
-          </a:prstGeom>
-          <a:noFill/>
-        </p:spPr>
-        <p:txBody>
-          <a:bodyPr wrap="square">
-            <a:spAutoFit/>
-          </a:bodyPr>
-          <a:lstStyle/>
-          <a:p>
-            <a:pPr algn="l"/>
-            <a:r>
-              <a:rPr sz="1200" b="1" i="0">
-                <a:solidFill>
-                  <a:srgbClr val="1F3864"/>
-                </a:solidFill>
-                <a:latin typeface="Calibri"/>
-              </a:rPr>
-              <a:t>OTIF by Distribution Channel</a:t>
-            </a:r>
-          </a:p>
-        </p:txBody>
-      </p:sp>
-      <p:sp>
-        <p:nvSpPr>
-          <p:cNvPr id="32" name="Rectangle 31"/>
-          <p:cNvSpPr/>
-          <p:nvPr/>
-        </p:nvSpPr>
-        <p:spPr>
-          <a:xfrm>
-            <a:off x="365760" y="3794760"/>
-            <a:ext cx="2468880" cy="1051560"/>
-          </a:xfrm>
-          <a:prstGeom prst="rect">
-            <a:avLst/>
-          </a:prstGeom>
-          <a:solidFill>
-            <a:srgbClr val="C00000"/>
-          </a:solidFill>
-          <a:ln>
-            <a:noFill/>
-          </a:ln>
-        </p:spPr>
-        <p:style>
-          <a:lnRef idx="1">
-            <a:schemeClr val="accent1"/>
-          </a:lnRef>
-          <a:fillRef idx="3">
-            <a:schemeClr val="accent1"/>
-          </a:fillRef>
-          <a:effectRef idx="2">
-            <a:schemeClr val="accent1"/>
-          </a:effectRef>
-          <a:fontRef idx="minor">
-            <a:schemeClr val="lt1"/>
-          </a:fontRef>
-        </p:style>
-        <p:txBody>
-          <a:bodyPr rtlCol="0" anchor="ctr"/>
-          <a:lstStyle/>
-          <a:p>
-            <a:pPr algn="ctr"/>
-          </a:p>
-        </p:txBody>
-      </p:sp>
-      <p:sp>
-        <p:nvSpPr>
-          <p:cNvPr id="33" name="TextBox 32"/>
-          <p:cNvSpPr txBox="1"/>
-          <p:nvPr/>
-        </p:nvSpPr>
-        <p:spPr>
-          <a:xfrm>
-            <a:off x="457200" y="3886200"/>
-            <a:ext cx="2286000" cy="320040"/>
-          </a:xfrm>
-          <a:prstGeom prst="rect">
-            <a:avLst/>
-          </a:prstGeom>
-          <a:noFill/>
-        </p:spPr>
-        <p:txBody>
-          <a:bodyPr wrap="square">
-            <a:spAutoFit/>
-          </a:bodyPr>
-          <a:lstStyle/>
-          <a:p>
-            <a:pPr algn="ctr"/>
-            <a:r>
-              <a:rPr sz="950" b="1" i="0">
-                <a:solidFill>
-                  <a:srgbClr val="FFFFFF"/>
-                </a:solidFill>
-                <a:latin typeface="Calibri"/>
-              </a:rPr>
-              <a:t>E-Commerce</a:t>
-            </a:r>
-          </a:p>
-        </p:txBody>
-      </p:sp>
-      <p:sp>
-        <p:nvSpPr>
-          <p:cNvPr id="34" name="TextBox 33"/>
-          <p:cNvSpPr txBox="1"/>
-          <p:nvPr/>
-        </p:nvSpPr>
-        <p:spPr>
-          <a:xfrm>
-            <a:off x="457200" y="4206240"/>
-            <a:ext cx="2286000" cy="502920"/>
-          </a:xfrm>
-          <a:prstGeom prst="rect">
-            <a:avLst/>
-          </a:prstGeom>
-          <a:noFill/>
-        </p:spPr>
-        <p:txBody>
-          <a:bodyPr wrap="square">
-            <a:spAutoFit/>
-          </a:bodyPr>
-          <a:lstStyle/>
-          <a:p>
-            <a:pPr algn="ctr"/>
-            <a:r>
-              <a:rPr sz="2200" b="1" i="0">
-                <a:solidFill>
-                  <a:srgbClr val="FFFFFF"/>
-                </a:solidFill>
-                <a:latin typeface="Calibri"/>
-              </a:rPr>
-              <a:t>16.2%</a:t>
-            </a:r>
-          </a:p>
-        </p:txBody>
-      </p:sp>
-      <p:sp>
-        <p:nvSpPr>
-          <p:cNvPr id="35" name="Rectangle 34"/>
-          <p:cNvSpPr/>
-          <p:nvPr/>
-        </p:nvSpPr>
-        <p:spPr>
-          <a:xfrm>
-            <a:off x="3017520" y="3794760"/>
-            <a:ext cx="2468880" cy="1051560"/>
-          </a:xfrm>
-          <a:prstGeom prst="rect">
-            <a:avLst/>
-          </a:prstGeom>
-          <a:solidFill>
-            <a:srgbClr val="C00000"/>
-          </a:solidFill>
-          <a:ln>
-            <a:noFill/>
-          </a:ln>
-        </p:spPr>
-        <p:style>
-          <a:lnRef idx="1">
-            <a:schemeClr val="accent1"/>
-          </a:lnRef>
-          <a:fillRef idx="3">
-            <a:schemeClr val="accent1"/>
-          </a:fillRef>
-          <a:effectRef idx="2">
-            <a:schemeClr val="accent1"/>
-          </a:effectRef>
-          <a:fontRef idx="minor">
-            <a:schemeClr val="lt1"/>
-          </a:fontRef>
-        </p:style>
-        <p:txBody>
-          <a:bodyPr rtlCol="0" anchor="ctr"/>
-          <a:lstStyle/>
-          <a:p>
-            <a:pPr algn="ctr"/>
-          </a:p>
-        </p:txBody>
-      </p:sp>
-      <p:sp>
-        <p:nvSpPr>
-          <p:cNvPr id="36" name="TextBox 35"/>
-          <p:cNvSpPr txBox="1"/>
-          <p:nvPr/>
-        </p:nvSpPr>
-        <p:spPr>
-          <a:xfrm>
-            <a:off x="3108960" y="3886200"/>
-            <a:ext cx="2286000" cy="320040"/>
-          </a:xfrm>
-          <a:prstGeom prst="rect">
-            <a:avLst/>
-          </a:prstGeom>
-          <a:noFill/>
-        </p:spPr>
-        <p:txBody>
-          <a:bodyPr wrap="square">
-            <a:spAutoFit/>
-          </a:bodyPr>
-          <a:lstStyle/>
-          <a:p>
-            <a:pPr algn="ctr"/>
-            <a:r>
-              <a:rPr sz="950" b="1" i="0">
-                <a:solidFill>
-                  <a:srgbClr val="FFFFFF"/>
-                </a:solidFill>
-                <a:latin typeface="Calibri"/>
-              </a:rPr>
-              <a:t>General Trade</a:t>
-            </a:r>
-          </a:p>
-        </p:txBody>
-      </p:sp>
-      <p:sp>
-        <p:nvSpPr>
-          <p:cNvPr id="37" name="TextBox 36"/>
-          <p:cNvSpPr txBox="1"/>
-          <p:nvPr/>
-        </p:nvSpPr>
-        <p:spPr>
-          <a:xfrm>
-            <a:off x="3108960" y="4206240"/>
-            <a:ext cx="2286000" cy="502920"/>
-          </a:xfrm>
-          <a:prstGeom prst="rect">
-            <a:avLst/>
-          </a:prstGeom>
-          <a:noFill/>
-        </p:spPr>
-        <p:txBody>
-          <a:bodyPr wrap="square">
-            <a:spAutoFit/>
-          </a:bodyPr>
-          <a:lstStyle/>
-          <a:p>
-            <a:pPr algn="ctr"/>
-            <a:r>
-              <a:rPr sz="2200" b="1" i="0">
-                <a:solidFill>
-                  <a:srgbClr val="FFFFFF"/>
-                </a:solidFill>
-                <a:latin typeface="Calibri"/>
-              </a:rPr>
-              <a:t>15.3%</a:t>
-            </a:r>
-          </a:p>
-        </p:txBody>
-      </p:sp>
-      <p:sp>
-        <p:nvSpPr>
-          <p:cNvPr id="38" name="Rectangle 37"/>
-          <p:cNvSpPr/>
-          <p:nvPr/>
-        </p:nvSpPr>
-        <p:spPr>
-          <a:xfrm>
-            <a:off x="365760" y="4983480"/>
-            <a:ext cx="2468880" cy="1051560"/>
-          </a:xfrm>
-          <a:prstGeom prst="rect">
-            <a:avLst/>
-          </a:prstGeom>
-          <a:solidFill>
-            <a:srgbClr val="C00000"/>
-          </a:solidFill>
-          <a:ln>
-            <a:noFill/>
-          </a:ln>
-        </p:spPr>
-        <p:style>
-          <a:lnRef idx="1">
-            <a:schemeClr val="accent1"/>
-          </a:lnRef>
-          <a:fillRef idx="3">
-            <a:schemeClr val="accent1"/>
-          </a:fillRef>
-          <a:effectRef idx="2">
-            <a:schemeClr val="accent1"/>
-          </a:effectRef>
-          <a:fontRef idx="minor">
-            <a:schemeClr val="lt1"/>
-          </a:fontRef>
-        </p:style>
-        <p:txBody>
-          <a:bodyPr rtlCol="0" anchor="ctr"/>
-          <a:lstStyle/>
-          <a:p>
-            <a:pPr algn="ctr"/>
-          </a:p>
-        </p:txBody>
-      </p:sp>
-      <p:sp>
-        <p:nvSpPr>
-          <p:cNvPr id="39" name="TextBox 38"/>
-          <p:cNvSpPr txBox="1"/>
-          <p:nvPr/>
-        </p:nvSpPr>
-        <p:spPr>
-          <a:xfrm>
-            <a:off x="457200" y="5074920"/>
-            <a:ext cx="2286000" cy="320040"/>
-          </a:xfrm>
-          <a:prstGeom prst="rect">
-            <a:avLst/>
-          </a:prstGeom>
-          <a:noFill/>
-        </p:spPr>
-        <p:txBody>
-          <a:bodyPr wrap="square">
-            <a:spAutoFit/>
-          </a:bodyPr>
-          <a:lstStyle/>
-          <a:p>
-            <a:pPr algn="ctr"/>
-            <a:r>
-              <a:rPr sz="950" b="1" i="0">
-                <a:solidFill>
-                  <a:srgbClr val="FFFFFF"/>
-                </a:solidFill>
-                <a:latin typeface="Calibri"/>
-              </a:rPr>
-              <a:t>Modern Trade</a:t>
-            </a:r>
-          </a:p>
-        </p:txBody>
-      </p:sp>
-      <p:sp>
-        <p:nvSpPr>
-          <p:cNvPr id="40" name="TextBox 39"/>
-          <p:cNvSpPr txBox="1"/>
-          <p:nvPr/>
-        </p:nvSpPr>
-        <p:spPr>
-          <a:xfrm>
-            <a:off x="457200" y="5394960"/>
-            <a:ext cx="2286000" cy="502920"/>
-          </a:xfrm>
-          <a:prstGeom prst="rect">
-            <a:avLst/>
-          </a:prstGeom>
-          <a:noFill/>
-        </p:spPr>
-        <p:txBody>
-          <a:bodyPr wrap="square">
-            <a:spAutoFit/>
-          </a:bodyPr>
-          <a:lstStyle/>
-          <a:p>
-            <a:pPr algn="ctr"/>
-            <a:r>
-              <a:rPr sz="2200" b="1" i="0">
-                <a:solidFill>
-                  <a:srgbClr val="FFFFFF"/>
-                </a:solidFill>
-                <a:latin typeface="Calibri"/>
-              </a:rPr>
-              <a:t>15.4%</a:t>
-            </a:r>
-          </a:p>
-        </p:txBody>
-      </p:sp>
-      <p:sp>
-        <p:nvSpPr>
-          <p:cNvPr id="41" name="Rectangle 40"/>
-          <p:cNvSpPr/>
-          <p:nvPr/>
-        </p:nvSpPr>
-        <p:spPr>
-          <a:xfrm>
-            <a:off x="3017520" y="4983480"/>
-            <a:ext cx="2468880" cy="1051560"/>
-          </a:xfrm>
-          <a:prstGeom prst="rect">
-            <a:avLst/>
-          </a:prstGeom>
-          <a:solidFill>
-            <a:srgbClr val="C00000"/>
-          </a:solidFill>
-          <a:ln>
-            <a:noFill/>
-          </a:ln>
-        </p:spPr>
-        <p:style>
-          <a:lnRef idx="1">
-            <a:schemeClr val="accent1"/>
-          </a:lnRef>
-          <a:fillRef idx="3">
-            <a:schemeClr val="accent1"/>
-          </a:fillRef>
-          <a:effectRef idx="2">
-            <a:schemeClr val="accent1"/>
-          </a:effectRef>
-          <a:fontRef idx="minor">
-            <a:schemeClr val="lt1"/>
-          </a:fontRef>
-        </p:style>
-        <p:txBody>
-          <a:bodyPr rtlCol="0" anchor="ctr"/>
-          <a:lstStyle/>
-          <a:p>
-            <a:pPr algn="ctr"/>
-          </a:p>
-        </p:txBody>
-      </p:sp>
-      <p:sp>
-        <p:nvSpPr>
-          <p:cNvPr id="42" name="TextBox 41"/>
-          <p:cNvSpPr txBox="1"/>
-          <p:nvPr/>
-        </p:nvSpPr>
-        <p:spPr>
-          <a:xfrm>
-            <a:off x="3108960" y="5074920"/>
-            <a:ext cx="2286000" cy="320040"/>
-          </a:xfrm>
-          <a:prstGeom prst="rect">
-            <a:avLst/>
-          </a:prstGeom>
-          <a:noFill/>
-        </p:spPr>
-        <p:txBody>
-          <a:bodyPr wrap="square">
-            <a:spAutoFit/>
-          </a:bodyPr>
-          <a:lstStyle/>
-          <a:p>
-            <a:pPr algn="ctr"/>
-            <a:r>
-              <a:rPr sz="950" b="1" i="0">
-                <a:solidFill>
-                  <a:srgbClr val="FFFFFF"/>
-                </a:solidFill>
-                <a:latin typeface="Calibri"/>
-              </a:rPr>
-              <a:t>On-Premise (Bar/Restaurant)</a:t>
-            </a:r>
-          </a:p>
-        </p:txBody>
-      </p:sp>
-      <p:sp>
-        <p:nvSpPr>
-          <p:cNvPr id="43" name="TextBox 42"/>
-          <p:cNvSpPr txBox="1"/>
-          <p:nvPr/>
-        </p:nvSpPr>
-        <p:spPr>
-          <a:xfrm>
-            <a:off x="3108960" y="5394960"/>
-            <a:ext cx="2286000" cy="502920"/>
-          </a:xfrm>
-          <a:prstGeom prst="rect">
-            <a:avLst/>
-          </a:prstGeom>
-          <a:noFill/>
-        </p:spPr>
-        <p:txBody>
-          <a:bodyPr wrap="square">
-            <a:spAutoFit/>
-          </a:bodyPr>
-          <a:lstStyle/>
-          <a:p>
-            <a:pPr algn="ctr"/>
-            <a:r>
-              <a:rPr sz="2200" b="1" i="0">
-                <a:solidFill>
-                  <a:srgbClr val="FFFFFF"/>
-                </a:solidFill>
-                <a:latin typeface="Calibri"/>
-              </a:rPr>
-              <a:t>12.7%</a:t>
-            </a:r>
-          </a:p>
-        </p:txBody>
-      </p:sp>
-      <p:sp>
-        <p:nvSpPr>
-          <p:cNvPr id="44" name="TextBox 43"/>
-          <p:cNvSpPr txBox="1"/>
-          <p:nvPr/>
-        </p:nvSpPr>
-        <p:spPr>
-          <a:xfrm>
-            <a:off x="6035040" y="3429000"/>
-            <a:ext cx="5669280" cy="256032"/>
-          </a:xfrm>
-          <a:prstGeom prst="rect">
-            <a:avLst/>
-          </a:prstGeom>
-          <a:noFill/>
-        </p:spPr>
-        <p:txBody>
-          <a:bodyPr wrap="square">
-            <a:spAutoFit/>
-          </a:bodyPr>
-          <a:lstStyle/>
-          <a:p>
-            <a:pPr algn="l"/>
-            <a:r>
-              <a:rPr sz="1200" b="1" i="0">
-                <a:solidFill>
-                  <a:srgbClr val="1F3864"/>
-                </a:solidFill>
-                <a:latin typeface="Calibri"/>
-              </a:rPr>
-              <a:t>Root Causes of OTIF Failures</a:t>
-            </a:r>
-          </a:p>
-        </p:txBody>
-      </p:sp>
-      <p:sp>
-        <p:nvSpPr>
-          <p:cNvPr id="45" name="Rectangle 44"/>
-          <p:cNvSpPr/>
-          <p:nvPr/>
-        </p:nvSpPr>
-        <p:spPr>
-          <a:xfrm>
-            <a:off x="6035040" y="3794760"/>
-            <a:ext cx="2651760" cy="420624"/>
-          </a:xfrm>
-          <a:prstGeom prst="rect">
-            <a:avLst/>
-          </a:prstGeom>
-          <a:solidFill>
-            <a:srgbClr val="F2F2F2"/>
-          </a:solidFill>
-          <a:ln>
-            <a:noFill/>
-          </a:ln>
-        </p:spPr>
-        <p:style>
-          <a:lnRef idx="1">
-            <a:schemeClr val="accent1"/>
-          </a:lnRef>
-          <a:fillRef idx="3">
-            <a:schemeClr val="accent1"/>
-          </a:fillRef>
-          <a:effectRef idx="2">
-            <a:schemeClr val="accent1"/>
-          </a:effectRef>
-          <a:fontRef idx="minor">
-            <a:schemeClr val="lt1"/>
-          </a:fontRef>
-        </p:style>
-        <p:txBody>
-          <a:bodyPr rtlCol="0" anchor="ctr"/>
-          <a:lstStyle/>
-          <a:p>
-            <a:pPr algn="ctr"/>
-          </a:p>
-        </p:txBody>
-      </p:sp>
-      <p:sp>
-        <p:nvSpPr>
-          <p:cNvPr id="46" name="TextBox 45"/>
-          <p:cNvSpPr txBox="1"/>
-          <p:nvPr/>
-        </p:nvSpPr>
-        <p:spPr>
-          <a:xfrm>
-            <a:off x="6080760" y="3849624"/>
-            <a:ext cx="2560320" cy="310896"/>
-          </a:xfrm>
-          <a:prstGeom prst="rect">
-            <a:avLst/>
-          </a:prstGeom>
-          <a:noFill/>
-        </p:spPr>
-        <p:txBody>
-          <a:bodyPr wrap="square">
-            <a:spAutoFit/>
-          </a:bodyPr>
-          <a:lstStyle/>
-          <a:p>
-            <a:pPr algn="l"/>
-            <a:r>
-              <a:rPr sz="850" b="0" i="0">
-                <a:solidFill>
-                  <a:srgbClr val="262626"/>
-                </a:solidFill>
-                <a:latin typeface="Calibri"/>
-              </a:rPr>
-              <a:t>Supplier Delays</a:t>
-            </a:r>
-          </a:p>
-        </p:txBody>
-      </p:sp>
-      <p:sp>
-        <p:nvSpPr>
-          <p:cNvPr id="47" name="Rectangle 46"/>
-          <p:cNvSpPr/>
-          <p:nvPr/>
-        </p:nvSpPr>
-        <p:spPr>
-          <a:xfrm>
-            <a:off x="8778240" y="3849624"/>
-            <a:ext cx="1840229" cy="310896"/>
-          </a:xfrm>
-          <a:prstGeom prst="rect">
-            <a:avLst/>
-          </a:prstGeom>
-          <a:solidFill>
-            <a:srgbClr val="C00000"/>
-          </a:solidFill>
-          <a:ln>
-            <a:noFill/>
-          </a:ln>
-        </p:spPr>
-        <p:style>
-          <a:lnRef idx="1">
-            <a:schemeClr val="accent1"/>
-          </a:lnRef>
-          <a:fillRef idx="3">
-            <a:schemeClr val="accent1"/>
-          </a:fillRef>
-          <a:effectRef idx="2">
-            <a:schemeClr val="accent1"/>
-          </a:effectRef>
-          <a:fontRef idx="minor">
-            <a:schemeClr val="lt1"/>
-          </a:fontRef>
-        </p:style>
-        <p:txBody>
-          <a:bodyPr rtlCol="0" anchor="ctr"/>
-          <a:lstStyle/>
-          <a:p>
-            <a:pPr algn="ctr"/>
-          </a:p>
-        </p:txBody>
-      </p:sp>
-      <p:sp>
-        <p:nvSpPr>
-          <p:cNvPr id="48" name="TextBox 47"/>
-          <p:cNvSpPr txBox="1"/>
-          <p:nvPr/>
-        </p:nvSpPr>
-        <p:spPr>
-          <a:xfrm>
-            <a:off x="10664190" y="3849624"/>
-            <a:ext cx="548640" cy="310896"/>
-          </a:xfrm>
-          <a:prstGeom prst="rect">
-            <a:avLst/>
-          </a:prstGeom>
-          <a:noFill/>
-        </p:spPr>
-        <p:txBody>
-          <a:bodyPr wrap="square">
-            <a:spAutoFit/>
-          </a:bodyPr>
-          <a:lstStyle/>
-          <a:p>
-            <a:pPr algn="l"/>
-            <a:r>
-              <a:rPr sz="850" b="1" i="0">
-                <a:solidFill>
-                  <a:srgbClr val="1F3864"/>
-                </a:solidFill>
-                <a:latin typeface="Calibri"/>
-              </a:rPr>
-              <a:t>35%</a:t>
-            </a:r>
-          </a:p>
-        </p:txBody>
-      </p:sp>
-      <p:sp>
-        <p:nvSpPr>
-          <p:cNvPr id="49" name="Rectangle 48"/>
-          <p:cNvSpPr/>
-          <p:nvPr/>
-        </p:nvSpPr>
-        <p:spPr>
-          <a:xfrm>
-            <a:off x="6035040" y="4288536"/>
-            <a:ext cx="2651760" cy="420624"/>
-          </a:xfrm>
-          <a:prstGeom prst="rect">
-            <a:avLst/>
-          </a:prstGeom>
-          <a:solidFill>
-            <a:srgbClr val="F2F2F2"/>
-          </a:solidFill>
-          <a:ln>
-            <a:noFill/>
-          </a:ln>
-        </p:spPr>
-        <p:style>
-          <a:lnRef idx="1">
-            <a:schemeClr val="accent1"/>
-          </a:lnRef>
-          <a:fillRef idx="3">
-            <a:schemeClr val="accent1"/>
-          </a:fillRef>
-          <a:effectRef idx="2">
-            <a:schemeClr val="accent1"/>
-          </a:effectRef>
-          <a:fontRef idx="minor">
-            <a:schemeClr val="lt1"/>
-          </a:fontRef>
-        </p:style>
-        <p:txBody>
-          <a:bodyPr rtlCol="0" anchor="ctr"/>
-          <a:lstStyle/>
-          <a:p>
-            <a:pPr algn="ctr"/>
-          </a:p>
-        </p:txBody>
-      </p:sp>
-      <p:sp>
-        <p:nvSpPr>
-          <p:cNvPr id="50" name="TextBox 49"/>
-          <p:cNvSpPr txBox="1"/>
-          <p:nvPr/>
-        </p:nvSpPr>
-        <p:spPr>
-          <a:xfrm>
-            <a:off x="6080760" y="4343400"/>
-            <a:ext cx="2560320" cy="310896"/>
-          </a:xfrm>
-          <a:prstGeom prst="rect">
-            <a:avLst/>
-          </a:prstGeom>
-          <a:noFill/>
-        </p:spPr>
-        <p:txBody>
-          <a:bodyPr wrap="square">
-            <a:spAutoFit/>
-          </a:bodyPr>
-          <a:lstStyle/>
-          <a:p>
-            <a:pPr algn="l"/>
-            <a:r>
-              <a:rPr sz="850" b="0" i="0">
-                <a:solidFill>
-                  <a:srgbClr val="262626"/>
-                </a:solidFill>
-                <a:latin typeface="Calibri"/>
-              </a:rPr>
-              <a:t>Transportation Issues</a:t>
-            </a:r>
-          </a:p>
-        </p:txBody>
-      </p:sp>
-      <p:sp>
-        <p:nvSpPr>
-          <p:cNvPr id="51" name="Rectangle 50"/>
-          <p:cNvSpPr/>
-          <p:nvPr/>
-        </p:nvSpPr>
-        <p:spPr>
-          <a:xfrm>
-            <a:off x="8778240" y="4343400"/>
-            <a:ext cx="1472184" cy="310896"/>
-          </a:xfrm>
-          <a:prstGeom prst="rect">
-            <a:avLst/>
-          </a:prstGeom>
-          <a:solidFill>
-            <a:srgbClr val="FFC000"/>
-          </a:solidFill>
-          <a:ln>
-            <a:noFill/>
-          </a:ln>
-        </p:spPr>
-        <p:style>
-          <a:lnRef idx="1">
-            <a:schemeClr val="accent1"/>
-          </a:lnRef>
-          <a:fillRef idx="3">
-            <a:schemeClr val="accent1"/>
-          </a:fillRef>
-          <a:effectRef idx="2">
-            <a:schemeClr val="accent1"/>
-          </a:effectRef>
-          <a:fontRef idx="minor">
-            <a:schemeClr val="lt1"/>
-          </a:fontRef>
-        </p:style>
-        <p:txBody>
-          <a:bodyPr rtlCol="0" anchor="ctr"/>
-          <a:lstStyle/>
-          <a:p>
-            <a:pPr algn="ctr"/>
-          </a:p>
-        </p:txBody>
-      </p:sp>
-      <p:sp>
-        <p:nvSpPr>
-          <p:cNvPr id="52" name="TextBox 51"/>
-          <p:cNvSpPr txBox="1"/>
-          <p:nvPr/>
-        </p:nvSpPr>
-        <p:spPr>
-          <a:xfrm>
-            <a:off x="10296144" y="4343400"/>
-            <a:ext cx="548640" cy="310896"/>
-          </a:xfrm>
-          <a:prstGeom prst="rect">
-            <a:avLst/>
-          </a:prstGeom>
-          <a:noFill/>
-        </p:spPr>
-        <p:txBody>
-          <a:bodyPr wrap="square">
-            <a:spAutoFit/>
-          </a:bodyPr>
-          <a:lstStyle/>
-          <a:p>
-            <a:pPr algn="l"/>
-            <a:r>
-              <a:rPr sz="850" b="1" i="0">
-                <a:solidFill>
-                  <a:srgbClr val="1F3864"/>
-                </a:solidFill>
-                <a:latin typeface="Calibri"/>
-              </a:rPr>
-              <a:t>28%</a:t>
-            </a:r>
-          </a:p>
-        </p:txBody>
-      </p:sp>
-      <p:sp>
-        <p:nvSpPr>
-          <p:cNvPr id="53" name="Rectangle 52"/>
-          <p:cNvSpPr/>
-          <p:nvPr/>
-        </p:nvSpPr>
-        <p:spPr>
-          <a:xfrm>
-            <a:off x="6035040" y="4782312"/>
-            <a:ext cx="2651760" cy="420624"/>
-          </a:xfrm>
-          <a:prstGeom prst="rect">
-            <a:avLst/>
-          </a:prstGeom>
-          <a:solidFill>
-            <a:srgbClr val="F2F2F2"/>
-          </a:solidFill>
-          <a:ln>
-            <a:noFill/>
-          </a:ln>
-        </p:spPr>
-        <p:style>
-          <a:lnRef idx="1">
-            <a:schemeClr val="accent1"/>
-          </a:lnRef>
-          <a:fillRef idx="3">
-            <a:schemeClr val="accent1"/>
-          </a:fillRef>
-          <a:effectRef idx="2">
-            <a:schemeClr val="accent1"/>
-          </a:effectRef>
-          <a:fontRef idx="minor">
-            <a:schemeClr val="lt1"/>
-          </a:fontRef>
-        </p:style>
-        <p:txBody>
-          <a:bodyPr rtlCol="0" anchor="ctr"/>
-          <a:lstStyle/>
-          <a:p>
-            <a:pPr algn="ctr"/>
-          </a:p>
-        </p:txBody>
-      </p:sp>
-      <p:sp>
-        <p:nvSpPr>
-          <p:cNvPr id="54" name="TextBox 53"/>
-          <p:cNvSpPr txBox="1"/>
-          <p:nvPr/>
-        </p:nvSpPr>
-        <p:spPr>
-          <a:xfrm>
-            <a:off x="6080760" y="4837176"/>
-            <a:ext cx="2560320" cy="310896"/>
-          </a:xfrm>
-          <a:prstGeom prst="rect">
-            <a:avLst/>
-          </a:prstGeom>
-          <a:noFill/>
-        </p:spPr>
-        <p:txBody>
-          <a:bodyPr wrap="square">
-            <a:spAutoFit/>
-          </a:bodyPr>
-          <a:lstStyle/>
-          <a:p>
-            <a:pPr algn="l"/>
-            <a:r>
-              <a:rPr sz="850" b="0" i="0">
-                <a:solidFill>
-                  <a:srgbClr val="262626"/>
-                </a:solidFill>
-                <a:latin typeface="Calibri"/>
-              </a:rPr>
-              <a:t>Demand Forecast Error</a:t>
-            </a:r>
-          </a:p>
-        </p:txBody>
-      </p:sp>
-      <p:sp>
-        <p:nvSpPr>
-          <p:cNvPr id="55" name="Rectangle 54"/>
-          <p:cNvSpPr/>
-          <p:nvPr/>
-        </p:nvSpPr>
-        <p:spPr>
-          <a:xfrm>
-            <a:off x="8778240" y="4837176"/>
-            <a:ext cx="946403" cy="310896"/>
-          </a:xfrm>
-          <a:prstGeom prst="rect">
-            <a:avLst/>
-          </a:prstGeom>
-          <a:solidFill>
-            <a:srgbClr val="FFC000"/>
-          </a:solidFill>
-          <a:ln>
-            <a:noFill/>
-          </a:ln>
-        </p:spPr>
-        <p:style>
-          <a:lnRef idx="1">
-            <a:schemeClr val="accent1"/>
-          </a:lnRef>
-          <a:fillRef idx="3">
-            <a:schemeClr val="accent1"/>
-          </a:fillRef>
-          <a:effectRef idx="2">
-            <a:schemeClr val="accent1"/>
-          </a:effectRef>
-          <a:fontRef idx="minor">
-            <a:schemeClr val="lt1"/>
-          </a:fontRef>
-        </p:style>
-        <p:txBody>
-          <a:bodyPr rtlCol="0" anchor="ctr"/>
-          <a:lstStyle/>
-          <a:p>
-            <a:pPr algn="ctr"/>
-          </a:p>
-        </p:txBody>
-      </p:sp>
-      <p:sp>
-        <p:nvSpPr>
-          <p:cNvPr id="56" name="TextBox 55"/>
-          <p:cNvSpPr txBox="1"/>
-          <p:nvPr/>
-        </p:nvSpPr>
-        <p:spPr>
-          <a:xfrm>
-            <a:off x="9770364" y="4837176"/>
-            <a:ext cx="548640" cy="310896"/>
-          </a:xfrm>
-          <a:prstGeom prst="rect">
-            <a:avLst/>
-          </a:prstGeom>
-          <a:noFill/>
-        </p:spPr>
-        <p:txBody>
-          <a:bodyPr wrap="square">
-            <a:spAutoFit/>
-          </a:bodyPr>
-          <a:lstStyle/>
-          <a:p>
-            <a:pPr algn="l"/>
-            <a:r>
-              <a:rPr sz="850" b="1" i="0">
-                <a:solidFill>
-                  <a:srgbClr val="1F3864"/>
-                </a:solidFill>
-                <a:latin typeface="Calibri"/>
-              </a:rPr>
-              <a:t>18%</a:t>
-            </a:r>
-          </a:p>
-        </p:txBody>
-      </p:sp>
-      <p:sp>
-        <p:nvSpPr>
-          <p:cNvPr id="57" name="Rectangle 56"/>
-          <p:cNvSpPr/>
-          <p:nvPr/>
-        </p:nvSpPr>
-        <p:spPr>
-          <a:xfrm>
-            <a:off x="6035040" y="5276088"/>
-            <a:ext cx="2651760" cy="420624"/>
-          </a:xfrm>
-          <a:prstGeom prst="rect">
-            <a:avLst/>
-          </a:prstGeom>
-          <a:solidFill>
-            <a:srgbClr val="F2F2F2"/>
-          </a:solidFill>
-          <a:ln>
-            <a:noFill/>
-          </a:ln>
-        </p:spPr>
-        <p:style>
-          <a:lnRef idx="1">
-            <a:schemeClr val="accent1"/>
-          </a:lnRef>
-          <a:fillRef idx="3">
-            <a:schemeClr val="accent1"/>
-          </a:fillRef>
-          <a:effectRef idx="2">
-            <a:schemeClr val="accent1"/>
-          </a:effectRef>
-          <a:fontRef idx="minor">
-            <a:schemeClr val="lt1"/>
-          </a:fontRef>
-        </p:style>
-        <p:txBody>
-          <a:bodyPr rtlCol="0" anchor="ctr"/>
-          <a:lstStyle/>
-          <a:p>
-            <a:pPr algn="ctr"/>
-          </a:p>
-        </p:txBody>
-      </p:sp>
-      <p:sp>
-        <p:nvSpPr>
-          <p:cNvPr id="58" name="TextBox 57"/>
-          <p:cNvSpPr txBox="1"/>
-          <p:nvPr/>
-        </p:nvSpPr>
-        <p:spPr>
-          <a:xfrm>
-            <a:off x="6080760" y="5330952"/>
-            <a:ext cx="2560320" cy="310896"/>
-          </a:xfrm>
-          <a:prstGeom prst="rect">
-            <a:avLst/>
-          </a:prstGeom>
-          <a:noFill/>
-        </p:spPr>
-        <p:txBody>
-          <a:bodyPr wrap="square">
-            <a:spAutoFit/>
-          </a:bodyPr>
-          <a:lstStyle/>
-          <a:p>
-            <a:pPr algn="l"/>
-            <a:r>
-              <a:rPr sz="850" b="0" i="0">
-                <a:solidFill>
-                  <a:srgbClr val="262626"/>
-                </a:solidFill>
-                <a:latin typeface="Calibri"/>
-              </a:rPr>
-              <a:t>Warehouse Processing</a:t>
-            </a:r>
-          </a:p>
-        </p:txBody>
-      </p:sp>
-      <p:sp>
-        <p:nvSpPr>
-          <p:cNvPr id="59" name="Rectangle 58"/>
-          <p:cNvSpPr/>
-          <p:nvPr/>
-        </p:nvSpPr>
-        <p:spPr>
-          <a:xfrm>
-            <a:off x="8778240" y="5330952"/>
-            <a:ext cx="630936" cy="310896"/>
+            <a:off x="8595360" y="5815583"/>
+            <a:ext cx="416051" cy="329184"/>
           </a:xfrm>
           <a:prstGeom prst="rect">
             <a:avLst/>
@@ -22848,14 +23039,14 @@
       </p:sp>
       <p:sp>
         <p:nvSpPr>
-          <p:cNvPr id="60" name="TextBox 59"/>
-          <p:cNvSpPr txBox="1"/>
-          <p:nvPr/>
-        </p:nvSpPr>
-        <p:spPr>
-          <a:xfrm>
-            <a:off x="9454896" y="5330952"/>
-            <a:ext cx="548640" cy="310896"/>
+          <p:cNvPr id="65" name="TextBox 64"/>
+          <p:cNvSpPr txBox="1"/>
+          <p:nvPr/>
+        </p:nvSpPr>
+        <p:spPr>
+          <a:xfrm>
+            <a:off x="9057132" y="5861303"/>
+            <a:ext cx="548640" cy="237744"/>
           </a:xfrm>
           <a:prstGeom prst="rect">
             <a:avLst/>
@@ -22876,162 +23067,6 @@
                 </a:solidFill>
                 <a:latin typeface="Calibri"/>
               </a:rPr>
-              <a:t>12%</a:t>
-            </a:r>
-          </a:p>
-        </p:txBody>
-      </p:sp>
-      <p:sp>
-        <p:nvSpPr>
-          <p:cNvPr id="61" name="Rectangle 60"/>
-          <p:cNvSpPr/>
-          <p:nvPr/>
-        </p:nvSpPr>
-        <p:spPr>
-          <a:xfrm>
-            <a:off x="6035040" y="5769864"/>
-            <a:ext cx="2651760" cy="420624"/>
-          </a:xfrm>
-          <a:prstGeom prst="rect">
-            <a:avLst/>
-          </a:prstGeom>
-          <a:solidFill>
-            <a:srgbClr val="F2F2F2"/>
-          </a:solidFill>
-          <a:ln>
-            <a:noFill/>
-          </a:ln>
-        </p:spPr>
-        <p:style>
-          <a:lnRef idx="1">
-            <a:schemeClr val="accent1"/>
-          </a:lnRef>
-          <a:fillRef idx="3">
-            <a:schemeClr val="accent1"/>
-          </a:fillRef>
-          <a:effectRef idx="2">
-            <a:schemeClr val="accent1"/>
-          </a:effectRef>
-          <a:fontRef idx="minor">
-            <a:schemeClr val="lt1"/>
-          </a:fontRef>
-        </p:style>
-        <p:txBody>
-          <a:bodyPr rtlCol="0" anchor="ctr"/>
-          <a:lstStyle/>
-          <a:p>
-            <a:pPr algn="ctr"/>
-          </a:p>
-        </p:txBody>
-      </p:sp>
-      <p:sp>
-        <p:nvSpPr>
-          <p:cNvPr id="62" name="TextBox 61"/>
-          <p:cNvSpPr txBox="1"/>
-          <p:nvPr/>
-        </p:nvSpPr>
-        <p:spPr>
-          <a:xfrm>
-            <a:off x="6080760" y="5824728"/>
-            <a:ext cx="2560320" cy="310896"/>
-          </a:xfrm>
-          <a:prstGeom prst="rect">
-            <a:avLst/>
-          </a:prstGeom>
-          <a:noFill/>
-        </p:spPr>
-        <p:txBody>
-          <a:bodyPr wrap="square">
-            <a:spAutoFit/>
-          </a:bodyPr>
-          <a:lstStyle/>
-          <a:p>
-            <a:pPr algn="l"/>
-            <a:r>
-              <a:rPr sz="850" b="0" i="0">
-                <a:solidFill>
-                  <a:srgbClr val="262626"/>
-                </a:solidFill>
-                <a:latin typeface="Calibri"/>
-              </a:rPr>
-              <a:t>Documentation/Compliance</a:t>
-            </a:r>
-          </a:p>
-        </p:txBody>
-      </p:sp>
-      <p:sp>
-        <p:nvSpPr>
-          <p:cNvPr id="63" name="Rectangle 62"/>
-          <p:cNvSpPr/>
-          <p:nvPr/>
-        </p:nvSpPr>
-        <p:spPr>
-          <a:xfrm>
-            <a:off x="8778240" y="5824728"/>
-            <a:ext cx="368046" cy="310896"/>
-          </a:xfrm>
-          <a:prstGeom prst="rect">
-            <a:avLst/>
-          </a:prstGeom>
-          <a:solidFill>
-            <a:srgbClr val="2E75B6"/>
-          </a:solidFill>
-          <a:ln>
-            <a:noFill/>
-          </a:ln>
-        </p:spPr>
-        <p:style>
-          <a:lnRef idx="1">
-            <a:schemeClr val="accent1"/>
-          </a:lnRef>
-          <a:fillRef idx="3">
-            <a:schemeClr val="accent1"/>
-          </a:fillRef>
-          <a:effectRef idx="2">
-            <a:schemeClr val="accent1"/>
-          </a:effectRef>
-          <a:fontRef idx="minor">
-            <a:schemeClr val="lt1"/>
-          </a:fontRef>
-        </p:style>
-        <p:txBody>
-          <a:bodyPr rtlCol="0" anchor="ctr"/>
-          <a:lstStyle/>
-          <a:p>
-            <a:pPr algn="ctr"/>
-          </a:p>
-        </p:txBody>
-      </p:sp>
-      <p:sp>
-        <p:nvSpPr>
-          <p:cNvPr id="64" name="TextBox 63"/>
-          <p:cNvSpPr txBox="1"/>
-          <p:nvPr/>
-        </p:nvSpPr>
-        <p:spPr>
-          <a:xfrm>
-            <a:off x="9192006" y="5824728"/>
-            <a:ext cx="548640" cy="310896"/>
-          </a:xfrm>
-          <a:prstGeom prst="rect">
-            <a:avLst/>
-          </a:prstGeom>
-          <a:noFill/>
-        </p:spPr>
-        <p:txBody>
-          <a:bodyPr wrap="square">
-            <a:spAutoFit/>
-          </a:bodyPr>
-          <a:lstStyle/>
-          <a:p>
-            <a:pPr algn="l"/>
-            <a:r>
-              <a:rPr sz="850" b="1" i="0">
-                <a:solidFill>
-                  <a:srgbClr val="1F3864"/>
-                </a:solidFill>
-                <a:latin typeface="Calibri"/>
-              </a:rPr>
               <a:t>7%</a:t>
             </a:r>
           </a:p>
@@ -23039,7 +23074,7 @@
       </p:sp>
       <p:sp>
         <p:nvSpPr>
-          <p:cNvPr id="65" name="TextBox 64"/>
+          <p:cNvPr id="66" name="TextBox 65"/>
           <p:cNvSpPr txBox="1"/>
           <p:nvPr/>
         </p:nvSpPr>
@@ -23319,7 +23354,7 @@
                 </a:solidFill>
                 <a:latin typeface="Calibri"/>
               </a:rPr>
-              <a:t>6</a:t>
+              <a:t>0</a:t>
             </a:r>
           </a:p>
         </p:txBody>
@@ -23467,7 +23502,7 @@
                 </a:solidFill>
                 <a:latin typeface="Calibri"/>
               </a:rPr>
-              <a:t>13</a:t>
+              <a:t>20</a:t>
             </a:r>
           </a:p>
         </p:txBody>
@@ -23615,7 +23650,7 @@
                 </a:solidFill>
                 <a:latin typeface="Calibri"/>
               </a:rPr>
-              <a:t>1</a:t>
+              <a:t>0</a:t>
             </a:r>
           </a:p>
         </p:txBody>
@@ -24960,7 +24995,7 @@
                 </a:solidFill>
                 <a:latin typeface="Calibri"/>
               </a:rPr>
-              <a:t>DIST-EAS-01</a:t>
+              <a:t>DIST-NOR-04</a:t>
             </a:r>
           </a:p>
         </p:txBody>
@@ -25038,7 +25073,7 @@
                 </a:solidFill>
                 <a:latin typeface="Calibri"/>
               </a:rPr>
-              <a:t>North India</a:t>
+              <a:t>East India</a:t>
             </a:r>
           </a:p>
         </p:txBody>
@@ -25116,7 +25151,7 @@
                 </a:solidFill>
                 <a:latin typeface="Calibri"/>
               </a:rPr>
-              <a:t>89.0%</a:t>
+              <a:t>94.1%</a:t>
             </a:r>
           </a:p>
         </p:txBody>
@@ -25194,7 +25229,7 @@
                 </a:solidFill>
                 <a:latin typeface="Calibri"/>
               </a:rPr>
-              <a:t>90.1</a:t>
+              <a:t>84.9</a:t>
             </a:r>
           </a:p>
         </p:txBody>
@@ -25214,7 +25249,7 @@
             <a:avLst/>
           </a:prstGeom>
           <a:solidFill>
-            <a:srgbClr val="375623"/>
+            <a:srgbClr val="2E75B6"/>
           </a:solidFill>
           <a:ln>
             <a:noFill/>
@@ -25272,7 +25307,7 @@
                 </a:solidFill>
                 <a:latin typeface="Calibri"/>
               </a:rPr>
-              <a:t>A</a:t>
+              <a:t>B</a:t>
             </a:r>
           </a:p>
         </p:txBody>
@@ -25350,7 +25385,7 @@
                 </a:solidFill>
                 <a:latin typeface="Calibri"/>
               </a:rPr>
-              <a:t>DIST-EAS-03</a:t>
+              <a:t>DIST-WES-01</a:t>
             </a:r>
           </a:p>
         </p:txBody>
@@ -25428,7 +25463,7 @@
                 </a:solidFill>
                 <a:latin typeface="Calibri"/>
               </a:rPr>
-              <a:t>West India</a:t>
+              <a:t>Central India</a:t>
             </a:r>
           </a:p>
         </p:txBody>
@@ -25506,7 +25541,7 @@
                 </a:solidFill>
                 <a:latin typeface="Calibri"/>
               </a:rPr>
-              <a:t>95.0%</a:t>
+              <a:t>78.1%</a:t>
             </a:r>
           </a:p>
         </p:txBody>
@@ -25584,7 +25619,7 @@
                 </a:solidFill>
                 <a:latin typeface="Calibri"/>
               </a:rPr>
-              <a:t>89.9</a:t>
+              <a:t>84.1</a:t>
             </a:r>
           </a:p>
         </p:txBody>
@@ -25604,7 +25639,7 @@
             <a:avLst/>
           </a:prstGeom>
           <a:solidFill>
-            <a:srgbClr val="375623"/>
+            <a:srgbClr val="2E75B6"/>
           </a:solidFill>
           <a:ln>
             <a:noFill/>
@@ -25662,7 +25697,7 @@
                 </a:solidFill>
                 <a:latin typeface="Calibri"/>
               </a:rPr>
-              <a:t>A</a:t>
+              <a:t>B</a:t>
             </a:r>
           </a:p>
         </p:txBody>
@@ -25740,7 +25775,7 @@
                 </a:solidFill>
                 <a:latin typeface="Calibri"/>
               </a:rPr>
-              <a:t>DIST-CEN-03</a:t>
+              <a:t>DIST-CEN-02</a:t>
             </a:r>
           </a:p>
         </p:txBody>
@@ -25818,7 +25853,7 @@
                 </a:solidFill>
                 <a:latin typeface="Calibri"/>
               </a:rPr>
-              <a:t>West India</a:t>
+              <a:t>North India</a:t>
             </a:r>
           </a:p>
         </p:txBody>
@@ -25896,7 +25931,7 @@
                 </a:solidFill>
                 <a:latin typeface="Calibri"/>
               </a:rPr>
-              <a:t>93.0%</a:t>
+              <a:t>91.9%</a:t>
             </a:r>
           </a:p>
         </p:txBody>
@@ -25974,7 +26009,7 @@
                 </a:solidFill>
                 <a:latin typeface="Calibri"/>
               </a:rPr>
-              <a:t>87.3</a:t>
+              <a:t>84.1</a:t>
             </a:r>
           </a:p>
         </p:txBody>
@@ -25994,7 +26029,7 @@
             <a:avLst/>
           </a:prstGeom>
           <a:solidFill>
-            <a:srgbClr val="375623"/>
+            <a:srgbClr val="2E75B6"/>
           </a:solidFill>
           <a:ln>
             <a:noFill/>
@@ -26052,7 +26087,7 @@
                 </a:solidFill>
                 <a:latin typeface="Calibri"/>
               </a:rPr>
-              <a:t>A</a:t>
+              <a:t>B</a:t>
             </a:r>
           </a:p>
         </p:txBody>
@@ -26130,7 +26165,7 @@
                 </a:solidFill>
                 <a:latin typeface="Calibri"/>
               </a:rPr>
-              <a:t>DIST-WES-03</a:t>
+              <a:t>DIST-SOU-04</a:t>
             </a:r>
           </a:p>
         </p:txBody>
@@ -26286,7 +26321,7 @@
                 </a:solidFill>
                 <a:latin typeface="Calibri"/>
               </a:rPr>
-              <a:t>94.8%</a:t>
+              <a:t>83.5%</a:t>
             </a:r>
           </a:p>
         </p:txBody>
@@ -26364,7 +26399,7 @@
                 </a:solidFill>
                 <a:latin typeface="Calibri"/>
               </a:rPr>
-              <a:t>85.8</a:t>
+              <a:t>83.6</a:t>
             </a:r>
           </a:p>
         </p:txBody>
@@ -26384,7 +26419,7 @@
             <a:avLst/>
           </a:prstGeom>
           <a:solidFill>
-            <a:srgbClr val="375623"/>
+            <a:srgbClr val="2E75B6"/>
           </a:solidFill>
           <a:ln>
             <a:noFill/>
@@ -26442,7 +26477,7 @@
                 </a:solidFill>
                 <a:latin typeface="Calibri"/>
               </a:rPr>
-              <a:t>A</a:t>
+              <a:t>B</a:t>
             </a:r>
           </a:p>
         </p:txBody>
@@ -26520,7 +26555,7 @@
                 </a:solidFill>
                 <a:latin typeface="Calibri"/>
               </a:rPr>
-              <a:t>DIST-NOR-02</a:t>
+              <a:t>DIST-NOR-01</a:t>
             </a:r>
           </a:p>
         </p:txBody>
@@ -26598,7 +26633,7 @@
                 </a:solidFill>
                 <a:latin typeface="Calibri"/>
               </a:rPr>
-              <a:t>Central India</a:t>
+              <a:t>West India</a:t>
             </a:r>
           </a:p>
         </p:txBody>
@@ -26676,7 +26711,7 @@
                 </a:solidFill>
                 <a:latin typeface="Calibri"/>
               </a:rPr>
-              <a:t>88.0%</a:t>
+              <a:t>79.1%</a:t>
             </a:r>
           </a:p>
         </p:txBody>
@@ -26754,7 +26789,7 @@
                 </a:solidFill>
                 <a:latin typeface="Calibri"/>
               </a:rPr>
-              <a:t>85.5</a:t>
+              <a:t>82.7</a:t>
             </a:r>
           </a:p>
         </p:txBody>
@@ -26774,7 +26809,7 @@
             <a:avLst/>
           </a:prstGeom>
           <a:solidFill>
-            <a:srgbClr val="375623"/>
+            <a:srgbClr val="2E75B6"/>
           </a:solidFill>
           <a:ln>
             <a:noFill/>
@@ -26832,7 +26867,7 @@
                 </a:solidFill>
                 <a:latin typeface="Calibri"/>
               </a:rPr>
-              <a:t>A</a:t>
+              <a:t>B</a:t>
             </a:r>
           </a:p>
         </p:txBody>
@@ -27335,7 +27370,7 @@
                 </a:solidFill>
                 <a:latin typeface="Calibri"/>
               </a:rPr>
-              <a:t>DIST-NOR-03</a:t>
+              <a:t>DIST-WES-03</a:t>
             </a:r>
           </a:p>
         </p:txBody>
@@ -27413,7 +27448,7 @@
                 </a:solidFill>
                 <a:latin typeface="Calibri"/>
               </a:rPr>
-              <a:t>West India</a:t>
+              <a:t>Central India</a:t>
             </a:r>
           </a:p>
         </p:txBody>
@@ -27491,7 +27526,7 @@
                 </a:solidFill>
                 <a:latin typeface="Calibri"/>
               </a:rPr>
-              <a:t>62.9%</a:t>
+              <a:t>66.4%</a:t>
             </a:r>
           </a:p>
         </p:txBody>
@@ -27569,7 +27604,7 @@
                 </a:solidFill>
                 <a:latin typeface="Calibri"/>
               </a:rPr>
-              <a:t>68.6</a:t>
+              <a:t>74.2</a:t>
             </a:r>
           </a:p>
         </p:txBody>
@@ -27589,7 +27624,7 @@
             <a:avLst/>
           </a:prstGeom>
           <a:solidFill>
-            <a:srgbClr val="FFC000"/>
+            <a:srgbClr val="2E75B6"/>
           </a:solidFill>
           <a:ln>
             <a:noFill/>
@@ -27647,7 +27682,7 @@
                 </a:solidFill>
                 <a:latin typeface="Calibri"/>
               </a:rPr>
-              <a:t>C</a:t>
+              <a:t>B</a:t>
             </a:r>
           </a:p>
         </p:txBody>
@@ -27725,7 +27760,7 @@
                 </a:solidFill>
                 <a:latin typeface="Calibri"/>
               </a:rPr>
-              <a:t>DIST-SOU-03</a:t>
+              <a:t>DIST-EAS-03</a:t>
             </a:r>
           </a:p>
         </p:txBody>
@@ -27803,7 +27838,7 @@
                 </a:solidFill>
                 <a:latin typeface="Calibri"/>
               </a:rPr>
-              <a:t>Central India</a:t>
+              <a:t>North India</a:t>
             </a:r>
           </a:p>
         </p:txBody>
@@ -27881,7 +27916,7 @@
                 </a:solidFill>
                 <a:latin typeface="Calibri"/>
               </a:rPr>
-              <a:t>62.7%</a:t>
+              <a:t>81.5%</a:t>
             </a:r>
           </a:p>
         </p:txBody>
@@ -27959,7 +27994,7 @@
                 </a:solidFill>
                 <a:latin typeface="Calibri"/>
               </a:rPr>
-              <a:t>72.4</a:t>
+              <a:t>75.7</a:t>
             </a:r>
           </a:p>
         </p:txBody>
@@ -28115,7 +28150,7 @@
                 </a:solidFill>
                 <a:latin typeface="Calibri"/>
               </a:rPr>
-              <a:t>DIST-EAS-04</a:t>
+              <a:t>DIST-WES-04</a:t>
             </a:r>
           </a:p>
         </p:txBody>
@@ -28271,7 +28306,7 @@
                 </a:solidFill>
                 <a:latin typeface="Calibri"/>
               </a:rPr>
-              <a:t>70.2%</a:t>
+              <a:t>76.6%</a:t>
             </a:r>
           </a:p>
         </p:txBody>
@@ -28349,7 +28384,7 @@
                 </a:solidFill>
                 <a:latin typeface="Calibri"/>
               </a:rPr>
-              <a:t>72.4</a:t>
+              <a:t>76.2</a:t>
             </a:r>
           </a:p>
         </p:txBody>
@@ -28505,7 +28540,7 @@
                 </a:solidFill>
                 <a:latin typeface="Calibri"/>
               </a:rPr>
-              <a:t>DIST-CEN-01</a:t>
+              <a:t>DIST-WES-02</a:t>
             </a:r>
           </a:p>
         </p:txBody>
@@ -28583,7 +28618,7 @@
                 </a:solidFill>
                 <a:latin typeface="Calibri"/>
               </a:rPr>
-              <a:t>North India</a:t>
+              <a:t>Central India</a:t>
             </a:r>
           </a:p>
         </p:txBody>
@@ -28661,7 +28696,7 @@
                 </a:solidFill>
                 <a:latin typeface="Calibri"/>
               </a:rPr>
-              <a:t>76.6%</a:t>
+              <a:t>70.7%</a:t>
             </a:r>
           </a:p>
         </p:txBody>
@@ -28739,7 +28774,7 @@
                 </a:solidFill>
                 <a:latin typeface="Calibri"/>
               </a:rPr>
-              <a:t>74.4</a:t>
+              <a:t>76.9</a:t>
             </a:r>
           </a:p>
         </p:txBody>
@@ -28895,7 +28930,7 @@
                 </a:solidFill>
                 <a:latin typeface="Calibri"/>
               </a:rPr>
-              <a:t>DIST-CEN-04</a:t>
+              <a:t>DIST-NOR-03</a:t>
             </a:r>
           </a:p>
         </p:txBody>
@@ -28973,7 +29008,7 @@
                 </a:solidFill>
                 <a:latin typeface="Calibri"/>
               </a:rPr>
-              <a:t>South India</a:t>
+              <a:t>West India</a:t>
             </a:r>
           </a:p>
         </p:txBody>
@@ -29051,7 +29086,7 @@
                 </a:solidFill>
                 <a:latin typeface="Calibri"/>
               </a:rPr>
-              <a:t>75.4%</a:t>
+              <a:t>72.7%</a:t>
             </a:r>
           </a:p>
         </p:txBody>
@@ -29129,7 +29164,7 @@
                 </a:solidFill>
                 <a:latin typeface="Calibri"/>
               </a:rPr>
-              <a:t>74.8</a:t>
+              <a:t>77.5</a:t>
             </a:r>
           </a:p>
         </p:txBody>

--- a/powerpoint/BeerFlow_Strategy_Deck.pptx
+++ b/powerpoint/BeerFlow_Strategy_Deck.pptx
@@ -8791,7 +8791,7 @@
                 </a:solidFill>
                 <a:latin typeface="Calibri"/>
               </a:rPr>
-              <a:t>harsh258.collab@gmail.com</a:t>
+              <a:t>pandey.monti24@gmail.com</a:t>
             </a:r>
           </a:p>
         </p:txBody>
